--- a/SLIDES_TP12.pptx
+++ b/SLIDES_TP12.pptx
@@ -4,9 +4,6 @@
   <p:sldMasterIdLst>
     <p:sldMasterId id="2147483648" r:id="rId1"/>
   </p:sldMasterIdLst>
-  <p:notesMasterIdLst>
-    <p:notesMasterId r:id="rId11"/>
-  </p:notesMasterIdLst>
   <p:sldIdLst>
     <p:sldId id="256" r:id="rId2"/>
     <p:sldId id="257" r:id="rId3"/>
@@ -17,7 +14,11 @@
     <p:sldId id="262" r:id="rId8"/>
     <p:sldId id="263" r:id="rId9"/>
     <p:sldId id="264" r:id="rId10"/>
+    <p:sldId id="265" r:id="rId11"/>
   </p:sldIdLst>
+  <p:notesMasterIdLst>
+    <p:notesMasterId r:id="rId12"/>
+  </p:notesMasterIdLst>
   <p:sldSz cx="12192000" cy="6858000"/>
   <p:notesSz cx="6858000" cy="12192000"/>
   <p:defaultTextStyle>
@@ -112,11 +113,6 @@
       </a:defRPr>
     </a:lvl9pPr>
   </p:defaultTextStyle>
-  <p:extLst>
-    <p:ext uri="{EFAFB233-063F-42B5-8137-9DF3F51BA10A}">
-      <p15:sldGuideLst xmlns:p15="http://schemas.microsoft.com/office/powerpoint/2012/main"/>
-    </p:ext>
-  </p:extLst>
 </p:presentation>
 </file>
 
@@ -142,10 +138,234 @@
           <a:chExt cx="0" cy="0"/>
         </a:xfrm>
       </p:grpSpPr>
+      <p:sp>
+        <p:nvSpPr>
+          <p:cNvPr id="2" name="Header Placeholder 1"/>
+          <p:cNvSpPr>
+            <a:spLocks noGrp="1"/>
+          </p:cNvSpPr>
+          <p:nvPr>
+            <p:ph type="hdr" sz="quarter"/>
+          </p:nvPr>
+        </p:nvSpPr>
+        <p:spPr>
+          <a:xfrm>
+            <a:off x="0" y="0"/>
+            <a:ext cx="2971800" cy="458788"/>
+          </a:xfrm>
+          <a:prstGeom prst="rect">
+            <a:avLst/>
+          </a:prstGeom>
+        </p:spPr>
+        <p:txBody>
+          <a:bodyPr vert="horz" lIns="91440" tIns="45720" rIns="91440" bIns="45720" rtlCol="0"/>
+          <a:lstStyle>
+            <a:lvl1pPr algn="l">
+              <a:defRPr sz="1200"/>
+            </a:lvl1pPr>
+          </a:lstStyle>
+          <a:p>
+            <a:endParaRPr lang="en-US"/>
+          </a:p>
+        </p:txBody>
+      </p:sp>
+      <p:sp>
+        <p:nvSpPr>
+          <p:cNvPr id="3" name="Date Placeholder 2"/>
+          <p:cNvSpPr>
+            <a:spLocks noGrp="1"/>
+          </p:cNvSpPr>
+          <p:nvPr>
+            <p:ph type="dt" idx="1"/>
+          </p:nvPr>
+        </p:nvSpPr>
+        <p:spPr>
+          <a:xfrm>
+            <a:off x="3884613" y="0"/>
+            <a:ext cx="2971800" cy="458788"/>
+          </a:xfrm>
+          <a:prstGeom prst="rect">
+            <a:avLst/>
+          </a:prstGeom>
+        </p:spPr>
+        <p:txBody>
+          <a:bodyPr vert="horz" lIns="91440" tIns="45720" rIns="91440" bIns="45720" rtlCol="0"/>
+          <a:lstStyle>
+            <a:lvl1pPr algn="r">
+              <a:defRPr sz="1200"/>
+            </a:lvl1pPr>
+          </a:lstStyle>
+          <a:p>
+            <a:fld id="{5282F153-3F37-0F45-9E97-73ACFA13230C}" type="datetimeFigureOut">
+              <a:rPr lang="en-US"/>
+              <a:t>7/23/19</a:t>
+            </a:fld>
+            <a:endParaRPr lang="en-US"/>
+          </a:p>
+        </p:txBody>
+      </p:sp>
+      <p:sp>
+        <p:nvSpPr>
+          <p:cNvPr id="4" name="Slide Image Placeholder 3"/>
+          <p:cNvSpPr>
+            <a:spLocks noGrp="1" noRot="1" noChangeAspect="1"/>
+          </p:cNvSpPr>
+          <p:nvPr>
+            <p:ph type="sldImg" idx="2"/>
+          </p:nvPr>
+        </p:nvSpPr>
+        <p:spPr>
+          <a:xfrm>
+            <a:off x="685800" y="1143000"/>
+            <a:ext cx="5486400" cy="3086100"/>
+          </a:xfrm>
+          <a:prstGeom prst="rect">
+            <a:avLst/>
+          </a:prstGeom>
+          <a:noFill/>
+          <a:ln w="12700">
+            <a:solidFill>
+              <a:prstClr val="black"/>
+            </a:solidFill>
+          </a:ln>
+        </p:spPr>
+        <p:txBody>
+          <a:bodyPr vert="horz" lIns="91440" tIns="45720" rIns="91440" bIns="45720" rtlCol="0" anchor="ctr"/>
+          <a:lstStyle/>
+          <a:p>
+            <a:endParaRPr lang="en-US"/>
+          </a:p>
+        </p:txBody>
+      </p:sp>
+      <p:sp>
+        <p:nvSpPr>
+          <p:cNvPr id="5" name="Notes Placeholder 4"/>
+          <p:cNvSpPr>
+            <a:spLocks noGrp="1"/>
+          </p:cNvSpPr>
+          <p:nvPr>
+            <p:ph type="body" sz="quarter" idx="3"/>
+          </p:nvPr>
+        </p:nvSpPr>
+        <p:spPr>
+          <a:xfrm>
+            <a:off x="685800" y="4400550"/>
+            <a:ext cx="5486400" cy="3600450"/>
+          </a:xfrm>
+          <a:prstGeom prst="rect">
+            <a:avLst/>
+          </a:prstGeom>
+        </p:spPr>
+        <p:txBody>
+          <a:bodyPr vert="horz" lIns="91440" tIns="45720" rIns="91440" bIns="45720" rtlCol="0"/>
+          <a:lstStyle/>
+          <a:p>
+            <a:pPr lvl="0"/>
+            <a:r>
+              <a:rPr lang="en-US"/>
+              <a:t>Click to edit Master text styles</a:t>
+            </a:r>
+          </a:p>
+          <a:p>
+            <a:pPr lvl="1"/>
+            <a:r>
+              <a:rPr lang="en-US"/>
+              <a:t>Second level</a:t>
+            </a:r>
+          </a:p>
+          <a:p>
+            <a:pPr lvl="2"/>
+            <a:r>
+              <a:rPr lang="en-US"/>
+              <a:t>Third level</a:t>
+            </a:r>
+          </a:p>
+          <a:p>
+            <a:pPr lvl="3"/>
+            <a:r>
+              <a:rPr lang="en-US"/>
+              <a:t>Fourth level</a:t>
+            </a:r>
+          </a:p>
+          <a:p>
+            <a:pPr lvl="4"/>
+            <a:r>
+              <a:rPr lang="en-US"/>
+              <a:t>Fifth level</a:t>
+            </a:r>
+          </a:p>
+        </p:txBody>
+      </p:sp>
+      <p:sp>
+        <p:nvSpPr>
+          <p:cNvPr id="6" name="Footer Placeholder 5"/>
+          <p:cNvSpPr>
+            <a:spLocks noGrp="1"/>
+          </p:cNvSpPr>
+          <p:nvPr>
+            <p:ph type="ftr" sz="quarter" idx="4"/>
+          </p:nvPr>
+        </p:nvSpPr>
+        <p:spPr>
+          <a:xfrm>
+            <a:off x="0" y="8685213"/>
+            <a:ext cx="2971800" cy="458787"/>
+          </a:xfrm>
+          <a:prstGeom prst="rect">
+            <a:avLst/>
+          </a:prstGeom>
+        </p:spPr>
+        <p:txBody>
+          <a:bodyPr vert="horz" lIns="91440" tIns="45720" rIns="91440" bIns="45720" rtlCol="0" anchor="b"/>
+          <a:lstStyle>
+            <a:lvl1pPr algn="l">
+              <a:defRPr sz="1200"/>
+            </a:lvl1pPr>
+          </a:lstStyle>
+          <a:p>
+            <a:endParaRPr lang="en-US"/>
+          </a:p>
+        </p:txBody>
+      </p:sp>
+      <p:sp>
+        <p:nvSpPr>
+          <p:cNvPr id="7" name="Slide Number Placeholder 6"/>
+          <p:cNvSpPr>
+            <a:spLocks noGrp="1"/>
+          </p:cNvSpPr>
+          <p:nvPr>
+            <p:ph type="sldNum" sz="quarter" idx="5"/>
+          </p:nvPr>
+        </p:nvSpPr>
+        <p:spPr>
+          <a:xfrm>
+            <a:off x="3884613" y="8685213"/>
+            <a:ext cx="2971800" cy="458787"/>
+          </a:xfrm>
+          <a:prstGeom prst="rect">
+            <a:avLst/>
+          </a:prstGeom>
+        </p:spPr>
+        <p:txBody>
+          <a:bodyPr vert="horz" lIns="91440" tIns="45720" rIns="91440" bIns="45720" rtlCol="0" anchor="b"/>
+          <a:lstStyle>
+            <a:lvl1pPr algn="r">
+              <a:defRPr sz="1200"/>
+            </a:lvl1pPr>
+          </a:lstStyle>
+          <a:p>
+            <a:fld id="{CE5E9CC1-C706-0F49-92D6-E571CC5EEA8F}" type="slidenum">
+              <a:rPr lang="en-US"/>
+              <a:t>‹#›</a:t>
+            </a:fld>
+            <a:endParaRPr lang="en-US"/>
+          </a:p>
+        </p:txBody>
+      </p:sp>
     </p:spTree>
     <p:extLst>
       <p:ext uri="{BB962C8B-B14F-4D97-AF65-F5344CB8AC3E}">
-        <p14:creationId xmlns:p14="http://schemas.microsoft.com/office/powerpoint/2010/main" val="991428072"/>
+        <p14:creationId xmlns:p14="http://schemas.microsoft.com/office/powerpoint/2010/main" val="1024086991"/>
       </p:ext>
     </p:extLst>
   </p:cSld>
@@ -293,6 +513,7 @@
               <a:rPr lang="en-US" dirty="0"/>
               <a:t>00:00-00:30 — Presentarnos y enunciar el problema en una frase: las entregas que fallan porque el cliente no está cuestan plata, y queremos saber si una red de lockers conviene y de qué tamaño.</a:t>
             </a:r>
+            <a:endParaRPr lang="en-US" dirty="0"/>
           </a:p>
         </p:txBody>
       </p:sp>
@@ -314,6 +535,94 @@
             <a:fld id="{F7021451-1387-4CA6-816F-3879F97B5CBC}" type="slidenum">
               <a:rPr lang="en-US"/>
               <a:t>1</a:t>
+            </a:fld>
+            <a:endParaRPr lang="en-US"/>
+          </a:p>
+        </p:txBody>
+      </p:sp>
+    </p:spTree>
+    <p:extLst>
+      <p:ext uri="{BB962C8B-B14F-4D97-AF65-F5344CB8AC3E}">
+        <p14:creationId xmlns:p14="http://schemas.microsoft.com/office/powerpoint/2010/main" val="1024086991"/>
+      </p:ext>
+    </p:extLst>
+  </p:cSld>
+  <p:clrMapOvr>
+    <a:masterClrMapping/>
+  </p:clrMapOvr>
+</p:notes>
+</file>
+
+<file path=ppt/notesSlides/notesSlide10.xml><?xml version="1.0" encoding="utf-8"?>
+<p:notes xmlns:a="http://schemas.openxmlformats.org/drawingml/2006/main" xmlns:r="http://schemas.openxmlformats.org/officeDocument/2006/relationships" xmlns:p="http://schemas.openxmlformats.org/presentationml/2006/main">
+  <p:cSld>
+    <p:spTree>
+      <p:nvGrpSpPr>
+        <p:cNvPr id="1" name=""/>
+        <p:cNvGrpSpPr/>
+        <p:nvPr/>
+      </p:nvGrpSpPr>
+      <p:grpSpPr>
+        <a:xfrm>
+          <a:off x="0" y="0"/>
+          <a:ext cx="0" cy="0"/>
+          <a:chOff x="0" y="0"/>
+          <a:chExt cx="0" cy="0"/>
+        </a:xfrm>
+      </p:grpSpPr>
+      <p:sp>
+        <p:nvSpPr>
+          <p:cNvPr id="2" name="Slide Image Placeholder 1"/>
+          <p:cNvSpPr>
+            <a:spLocks noGrp="1" noRot="1" noChangeAspect="1"/>
+          </p:cNvSpPr>
+          <p:nvPr>
+            <p:ph type="sldImg"/>
+          </p:nvPr>
+        </p:nvSpPr>
+        <p:spPr/>
+      </p:sp>
+      <p:sp>
+        <p:nvSpPr>
+          <p:cNvPr id="3" name="Notes Placeholder 2"/>
+          <p:cNvSpPr>
+            <a:spLocks noGrp="1"/>
+          </p:cNvSpPr>
+          <p:nvPr>
+            <p:ph type="body" idx="1"/>
+          </p:nvPr>
+        </p:nvSpPr>
+        <p:spPr/>
+        <p:txBody>
+          <a:bodyPr/>
+          <a:lstStyle/>
+          <a:p>
+            <a:r>
+              <a:rPr lang="en-US" dirty="0"/>
+              <a:t>06:15-07:00 — Cerrar con las cuatro conclusiones. La cuarta es la honesta: sabemos cuál es el límite del trabajo y por qué. Agradecer y abrir a preguntas.</a:t>
+            </a:r>
+            <a:endParaRPr lang="en-US" dirty="0"/>
+          </a:p>
+        </p:txBody>
+      </p:sp>
+      <p:sp>
+        <p:nvSpPr>
+          <p:cNvPr id="4" name="Slide Number Placeholder 3"/>
+          <p:cNvSpPr>
+            <a:spLocks noGrp="1"/>
+          </p:cNvSpPr>
+          <p:nvPr>
+            <p:ph type="sldNum" sz="quarter" idx="10"/>
+          </p:nvPr>
+        </p:nvSpPr>
+        <p:spPr/>
+        <p:txBody>
+          <a:bodyPr/>
+          <a:lstStyle/>
+          <a:p>
+            <a:fld id="{F7021451-1387-4CA6-816F-3879F97B5CBC}" type="slidenum">
+              <a:rPr lang="en-US"/>
+              <a:t>10</a:t>
             </a:fld>
             <a:endParaRPr lang="en-US"/>
           </a:p>
@@ -380,6 +689,7 @@
               <a:rPr lang="en-US" dirty="0"/>
               <a:t>00:30-01:15 — Tres datos de industria. El 36% por ausencia es el que justifica el locker. Cerrar con la pregunta del TP: existe un óptimo porque las dos fuerzas van en sentidos opuestos.</a:t>
             </a:r>
+            <a:endParaRPr lang="en-US" dirty="0"/>
           </a:p>
         </p:txBody>
       </p:sp>
@@ -467,6 +777,7 @@
               <a:rPr lang="en-US" dirty="0"/>
               <a:t>01:15-02:15 — Recorrer el esquema: el paquete entra tras el fallo, el usuario lo retira. Las devoluciones compiten por la misma capacidad. El camión pasa cada IPC y levanta devoluciones y vencidos. Destacar la política flexible: es el trade-off central del trabajo.</a:t>
             </a:r>
+            <a:endParaRPr lang="en-US" dirty="0"/>
           </a:p>
         </p:txBody>
       </p:sp>
@@ -552,8 +863,9 @@
           <a:p>
             <a:r>
               <a:rPr lang="en-US" dirty="0"/>
-              <a:t>02:15-03:00 — Distinguir lo observado de lo parametrizado. Los inter-arribos salen de datos reales y muestran estacionalidad. El retiro no se puede medir porque la red no está desplegada: es un estudio ex-ante, y su impacto lo acotamos con sensibilidad.</a:t>
-            </a:r>
+              <a:t>~00:45 — Clasificación de variables de la metodologia de simulacion. Lo clave: las de Control (cantidad de lockers, TMP, IPC) son las palancas que movemos; el CPE es la variable de resultado que minimizamos. Datos y Estado sostienen la dinamica.</a:t>
+            </a:r>
+            <a:endParaRPr lang="en-US" dirty="0"/>
           </a:p>
         </p:txBody>
       </p:sp>
@@ -639,8 +951,9 @@
           <a:p>
             <a:r>
               <a:rPr lang="en-US" dirty="0"/>
-              <a:t>03:00-03:45 — Cuatro puntos rápidos. Enfatizar números aleatorios comunes: es lo que permite afirmar que una config es mejor que otra sin que sea ruido de la simulación.</a:t>
-            </a:r>
+              <a:t>02:15-03:00 — Los inter-arribos salen de 4 semanas reales de operación y muestran estacionalidad (Cyber más frecuente que Normal). El modelo usa además las distribuciones de tiempo de retiro, devoluciones y tamaños de paquete.</a:t>
+            </a:r>
+            <a:endParaRPr lang="en-US" dirty="0"/>
           </a:p>
         </p:txBody>
       </p:sp>
@@ -726,8 +1039,9 @@
           <a:p>
             <a:r>
               <a:rPr lang="en-US" dirty="0"/>
-              <a:t>03:45-04:45 — La curva en U es el resultado central: el mínimo es interior, o sea existe un óptimo. Señalar que el óptimo cambia con el escenario: Cyber pide más medianos y grandes que Navidad.</a:t>
-            </a:r>
+              <a:t>03:00-03:45 — Cuatro puntos rápidos. Enfatizar números aleatorios comunes: es lo que permite afirmar que una config es mejor que otra sin que sea ruido de la simulación.</a:t>
+            </a:r>
+            <a:endParaRPr lang="en-US" dirty="0"/>
           </a:p>
         </p:txBody>
       </p:sp>
@@ -813,8 +1127,9 @@
           <a:p>
             <a:r>
               <a:rPr lang="en-US" dirty="0"/>
-              <a:t>04:45-05:30 — Comparamos cuatro diseños. El subdimensionado paga 45 veces más por paquete. Y el de máximo servicio no compensa: gasta más sin mejorar casi nada. El óptimo es el punto de equilibrio.</a:t>
-            </a:r>
+              <a:t>03:45-04:45 — La curva en U es el resultado central: el mínimo es interior, o sea existe un óptimo. Señalar que el óptimo cambia con el escenario: Cyber pide más medianos y grandes que Navidad.</a:t>
+            </a:r>
+            <a:endParaRPr lang="en-US" dirty="0"/>
           </a:p>
         </p:txBody>
       </p:sp>
@@ -900,8 +1215,9 @@
           <a:p>
             <a:r>
               <a:rPr lang="en-US" dirty="0"/>
-              <a:t>05:30-06:15 — La incertidumbre económica es inocua: el diseño aguanta. La de comportamiento no: el tiempo de retiro escala la capacidad necesaria. Por eso es el factor a monitorear en una implementación real.</a:t>
-            </a:r>
+              <a:t>04:45-05:30 — Comparamos cuatro diseños. El subdimensionado paga 45 veces más por paquete. Y el de máximo servicio no compensa: gasta más sin mejorar casi nada. El óptimo es el punto de equilibrio.</a:t>
+            </a:r>
+            <a:endParaRPr lang="en-US" dirty="0"/>
           </a:p>
         </p:txBody>
       </p:sp>
@@ -987,8 +1303,9 @@
           <a:p>
             <a:r>
               <a:rPr lang="en-US" dirty="0"/>
-              <a:t>06:15-07:00 — Cerrar con las cuatro conclusiones. La cuarta es la honesta: sabemos cuál es el límite del trabajo y por qué. Agradecer y abrir a preguntas.</a:t>
-            </a:r>
+              <a:t>05:30-06:15 — La incertidumbre económica es inocua: el diseño aguanta. La de comportamiento no: el tiempo de retiro escala la capacidad necesaria. Por eso es el factor a monitorear en una implementación real.</a:t>
+            </a:r>
+            <a:endParaRPr lang="en-US" dirty="0"/>
           </a:p>
         </p:txBody>
       </p:sp>
@@ -1061,11 +1378,6 @@
 <file path=ppt/slideMasters/slideMaster1.xml><?xml version="1.0" encoding="utf-8"?>
 <p:sldMaster xmlns:a="http://schemas.openxmlformats.org/drawingml/2006/main" xmlns:r="http://schemas.openxmlformats.org/officeDocument/2006/relationships" xmlns:p="http://schemas.openxmlformats.org/presentationml/2006/main">
   <p:cSld>
-    <p:bg>
-      <p:bgRef idx="1001">
-        <a:schemeClr val="bg1"/>
-      </p:bgRef>
-    </p:bg>
     <p:spTree>
       <p:nvGrpSpPr>
         <p:cNvPr id="1" name=""/>
@@ -1348,7 +1660,6 @@
         <a:solidFill>
           <a:srgbClr val="1E2761"/>
         </a:solidFill>
-        <a:effectLst/>
       </p:bgPr>
     </p:bg>
     <p:spTree>
@@ -1386,7 +1697,7 @@
           <a:bodyPr wrap="square" rtlCol="0" anchor="ctr"/>
           <a:lstStyle/>
           <a:p>
-            <a:pPr marL="0" indent="0">
+            <a:pPr indent="0" marL="0">
               <a:buNone/>
             </a:pPr>
             <a:r>
@@ -1425,7 +1736,7 @@
           <a:bodyPr wrap="square" rtlCol="0" anchor="ctr"/>
           <a:lstStyle/>
           <a:p>
-            <a:pPr marL="0" indent="0">
+            <a:pPr indent="0" marL="0">
               <a:buNone/>
             </a:pPr>
             <a:r>
@@ -1464,7 +1775,7 @@
           <a:bodyPr wrap="square" rtlCol="0" anchor="ctr"/>
           <a:lstStyle/>
           <a:p>
-            <a:pPr marL="0" indent="0">
+            <a:pPr indent="0" marL="0">
               <a:buNone/>
             </a:pPr>
             <a:r>
@@ -1503,7 +1814,7 @@
           <a:bodyPr wrap="square" rtlCol="0" anchor="ctr"/>
           <a:lstStyle/>
           <a:p>
-            <a:pPr marL="0" indent="0">
+            <a:pPr indent="0" marL="0">
               <a:buNone/>
             </a:pPr>
             <a:r>
@@ -1542,7 +1853,7 @@
           <a:bodyPr wrap="square" rtlCol="0" anchor="ctr"/>
           <a:lstStyle/>
           <a:p>
-            <a:pPr marL="0" indent="0">
+            <a:pPr indent="0" marL="0">
               <a:buNone/>
             </a:pPr>
             <a:r>
@@ -1557,6 +1868,469 @@
               <a:t>[Integrantes: completar]</a:t>
             </a:r>
             <a:endParaRPr lang="en-US" sz="1400" dirty="0"/>
+          </a:p>
+        </p:txBody>
+      </p:sp>
+    </p:spTree>
+  </p:cSld>
+  <p:clrMapOvr>
+    <a:masterClrMapping/>
+  </p:clrMapOvr>
+</p:sld>
+</file>
+
+<file path=ppt/slides/slide10.xml><?xml version="1.0" encoding="utf-8"?>
+<p:sld xmlns:a="http://schemas.openxmlformats.org/drawingml/2006/main" xmlns:r="http://schemas.openxmlformats.org/officeDocument/2006/relationships" xmlns:p="http://schemas.openxmlformats.org/presentationml/2006/main">
+  <p:cSld name="Slide 10">
+    <p:bg>
+      <p:bgPr>
+        <a:solidFill>
+          <a:srgbClr val="1E2761"/>
+        </a:solidFill>
+      </p:bgPr>
+    </p:bg>
+    <p:spTree>
+      <p:nvGrpSpPr>
+        <p:cNvPr id="1" name=""/>
+        <p:cNvGrpSpPr/>
+        <p:nvPr/>
+      </p:nvGrpSpPr>
+      <p:grpSpPr>
+        <a:xfrm>
+          <a:off x="0" y="0"/>
+          <a:ext cx="0" cy="0"/>
+          <a:chOff x="0" y="0"/>
+          <a:chExt cx="0" cy="0"/>
+        </a:xfrm>
+      </p:grpSpPr>
+      <p:sp>
+        <p:nvSpPr>
+          <p:cNvPr id="2" name="Text 0"/>
+          <p:cNvSpPr/>
+          <p:nvPr/>
+        </p:nvSpPr>
+        <p:spPr>
+          <a:xfrm>
+            <a:off x="731520" y="457200"/>
+            <a:ext cx="10698480" cy="731520"/>
+          </a:xfrm>
+          <a:prstGeom prst="rect">
+            <a:avLst/>
+          </a:prstGeom>
+          <a:noFill/>
+          <a:ln/>
+        </p:spPr>
+        <p:txBody>
+          <a:bodyPr wrap="square" rtlCol="0" anchor="ctr"/>
+          <a:lstStyle/>
+          <a:p>
+            <a:pPr indent="0" marL="0">
+              <a:buNone/>
+            </a:pPr>
+            <a:r>
+              <a:rPr lang="en-US" sz="3400" b="1" dirty="0">
+                <a:solidFill>
+                  <a:srgbClr val="FFFFFF"/>
+                </a:solidFill>
+                <a:latin typeface="Cambria" pitchFamily="34" charset="0"/>
+                <a:ea typeface="Cambria" pitchFamily="34" charset="-122"/>
+                <a:cs typeface="Cambria" pitchFamily="34" charset="-120"/>
+              </a:rPr>
+              <a:t>Conclusiones</a:t>
+            </a:r>
+            <a:endParaRPr lang="en-US" sz="3400" dirty="0"/>
+          </a:p>
+        </p:txBody>
+      </p:sp>
+      <p:sp>
+        <p:nvSpPr>
+          <p:cNvPr id="3" name="Shape 1"/>
+          <p:cNvSpPr/>
+          <p:nvPr/>
+        </p:nvSpPr>
+        <p:spPr>
+          <a:xfrm>
+            <a:off x="777240" y="1554480"/>
+            <a:ext cx="384048" cy="384048"/>
+          </a:xfrm>
+          <a:prstGeom prst="ellipse">
+            <a:avLst/>
+          </a:prstGeom>
+          <a:solidFill>
+            <a:srgbClr val="E8833A"/>
+          </a:solidFill>
+          <a:ln/>
+        </p:spPr>
+      </p:sp>
+      <p:sp>
+        <p:nvSpPr>
+          <p:cNvPr id="4" name="Text 2"/>
+          <p:cNvSpPr/>
+          <p:nvPr/>
+        </p:nvSpPr>
+        <p:spPr>
+          <a:xfrm>
+            <a:off x="1371600" y="1463040"/>
+            <a:ext cx="10058400" cy="411480"/>
+          </a:xfrm>
+          <a:prstGeom prst="rect">
+            <a:avLst/>
+          </a:prstGeom>
+          <a:noFill/>
+          <a:ln/>
+        </p:spPr>
+        <p:txBody>
+          <a:bodyPr wrap="square" lIns="0" tIns="0" rIns="0" bIns="0" rtlCol="0" anchor="ctr"/>
+          <a:lstStyle/>
+          <a:p>
+            <a:pPr indent="0" marL="0">
+              <a:buNone/>
+            </a:pPr>
+            <a:r>
+              <a:rPr lang="en-US" sz="2000" b="1" dirty="0">
+                <a:solidFill>
+                  <a:srgbClr val="E8833A"/>
+                </a:solidFill>
+                <a:latin typeface="Cambria" pitchFamily="34" charset="0"/>
+                <a:ea typeface="Cambria" pitchFamily="34" charset="-122"/>
+                <a:cs typeface="Cambria" pitchFamily="34" charset="-120"/>
+              </a:rPr>
+              <a:t>Existe un óptimo</a:t>
+            </a:r>
+            <a:endParaRPr lang="en-US" sz="2000" dirty="0"/>
+          </a:p>
+        </p:txBody>
+      </p:sp>
+      <p:sp>
+        <p:nvSpPr>
+          <p:cNvPr id="5" name="Text 3"/>
+          <p:cNvSpPr/>
+          <p:nvPr/>
+        </p:nvSpPr>
+        <p:spPr>
+          <a:xfrm>
+            <a:off x="1371600" y="1874520"/>
+            <a:ext cx="10058400" cy="548640"/>
+          </a:xfrm>
+          <a:prstGeom prst="rect">
+            <a:avLst/>
+          </a:prstGeom>
+          <a:noFill/>
+          <a:ln/>
+        </p:spPr>
+        <p:txBody>
+          <a:bodyPr wrap="square" lIns="0" tIns="0" rIns="0" bIns="0" rtlCol="0" anchor="ctr"/>
+          <a:lstStyle/>
+          <a:p>
+            <a:pPr indent="0" marL="0">
+              <a:buNone/>
+            </a:pPr>
+            <a:r>
+              <a:rPr lang="en-US" sz="1450" dirty="0">
+                <a:solidFill>
+                  <a:srgbClr val="FFFFFF"/>
+                </a:solidFill>
+                <a:latin typeface="Calibri" pitchFamily="34" charset="0"/>
+                <a:ea typeface="Calibri" pitchFamily="34" charset="-122"/>
+                <a:cs typeface="Calibri" pitchFamily="34" charset="-120"/>
+              </a:rPr>
+              <a:t>La curva de costo tiene mínimo interior: ni máxima capacidad ni mínima inversión.</a:t>
+            </a:r>
+            <a:endParaRPr lang="en-US" sz="1450" dirty="0"/>
+          </a:p>
+        </p:txBody>
+      </p:sp>
+      <p:sp>
+        <p:nvSpPr>
+          <p:cNvPr id="6" name="Shape 4"/>
+          <p:cNvSpPr/>
+          <p:nvPr/>
+        </p:nvSpPr>
+        <p:spPr>
+          <a:xfrm>
+            <a:off x="777240" y="2724912"/>
+            <a:ext cx="384048" cy="384048"/>
+          </a:xfrm>
+          <a:prstGeom prst="ellipse">
+            <a:avLst/>
+          </a:prstGeom>
+          <a:solidFill>
+            <a:srgbClr val="E8833A"/>
+          </a:solidFill>
+          <a:ln/>
+        </p:spPr>
+      </p:sp>
+      <p:sp>
+        <p:nvSpPr>
+          <p:cNvPr id="7" name="Text 5"/>
+          <p:cNvSpPr/>
+          <p:nvPr/>
+        </p:nvSpPr>
+        <p:spPr>
+          <a:xfrm>
+            <a:off x="1371600" y="2633472"/>
+            <a:ext cx="10058400" cy="411480"/>
+          </a:xfrm>
+          <a:prstGeom prst="rect">
+            <a:avLst/>
+          </a:prstGeom>
+          <a:noFill/>
+          <a:ln/>
+        </p:spPr>
+        <p:txBody>
+          <a:bodyPr wrap="square" lIns="0" tIns="0" rIns="0" bIns="0" rtlCol="0" anchor="ctr"/>
+          <a:lstStyle/>
+          <a:p>
+            <a:pPr indent="0" marL="0">
+              <a:buNone/>
+            </a:pPr>
+            <a:r>
+              <a:rPr lang="en-US" sz="2000" b="1" dirty="0">
+                <a:solidFill>
+                  <a:srgbClr val="E8833A"/>
+                </a:solidFill>
+                <a:latin typeface="Cambria" pitchFamily="34" charset="0"/>
+                <a:ea typeface="Cambria" pitchFamily="34" charset="-122"/>
+                <a:cs typeface="Cambria" pitchFamily="34" charset="-120"/>
+              </a:rPr>
+              <a:t>La estacionalidad decide el diseño</a:t>
+            </a:r>
+            <a:endParaRPr lang="en-US" sz="2000" dirty="0"/>
+          </a:p>
+        </p:txBody>
+      </p:sp>
+      <p:sp>
+        <p:nvSpPr>
+          <p:cNvPr id="8" name="Text 6"/>
+          <p:cNvSpPr/>
+          <p:nvPr/>
+        </p:nvSpPr>
+        <p:spPr>
+          <a:xfrm>
+            <a:off x="1371600" y="3044952"/>
+            <a:ext cx="10058400" cy="548640"/>
+          </a:xfrm>
+          <a:prstGeom prst="rect">
+            <a:avLst/>
+          </a:prstGeom>
+          <a:noFill/>
+          <a:ln/>
+        </p:spPr>
+        <p:txBody>
+          <a:bodyPr wrap="square" lIns="0" tIns="0" rIns="0" bIns="0" rtlCol="0" anchor="ctr"/>
+          <a:lstStyle/>
+          <a:p>
+            <a:pPr indent="0" marL="0">
+              <a:buNone/>
+            </a:pPr>
+            <a:r>
+              <a:rPr lang="en-US" sz="1450" dirty="0">
+                <a:solidFill>
+                  <a:srgbClr val="FFFFFF"/>
+                </a:solidFill>
+                <a:latin typeface="Calibri" pitchFamily="34" charset="0"/>
+                <a:ea typeface="Calibri" pitchFamily="34" charset="-122"/>
+                <a:cs typeface="Calibri" pitchFamily="34" charset="-120"/>
+              </a:rPr>
+              <a:t>Cyber exige más capacidad que Navidad: hay que elegir entre dimensionar para el pico o para el promedio.</a:t>
+            </a:r>
+            <a:endParaRPr lang="en-US" sz="1450" dirty="0"/>
+          </a:p>
+        </p:txBody>
+      </p:sp>
+      <p:sp>
+        <p:nvSpPr>
+          <p:cNvPr id="9" name="Shape 7"/>
+          <p:cNvSpPr/>
+          <p:nvPr/>
+        </p:nvSpPr>
+        <p:spPr>
+          <a:xfrm>
+            <a:off x="777240" y="3895344"/>
+            <a:ext cx="384048" cy="384048"/>
+          </a:xfrm>
+          <a:prstGeom prst="ellipse">
+            <a:avLst/>
+          </a:prstGeom>
+          <a:solidFill>
+            <a:srgbClr val="E8833A"/>
+          </a:solidFill>
+          <a:ln/>
+        </p:spPr>
+      </p:sp>
+      <p:sp>
+        <p:nvSpPr>
+          <p:cNvPr id="10" name="Text 8"/>
+          <p:cNvSpPr/>
+          <p:nvPr/>
+        </p:nvSpPr>
+        <p:spPr>
+          <a:xfrm>
+            <a:off x="1371600" y="3803904"/>
+            <a:ext cx="10058400" cy="411480"/>
+          </a:xfrm>
+          <a:prstGeom prst="rect">
+            <a:avLst/>
+          </a:prstGeom>
+          <a:noFill/>
+          <a:ln/>
+        </p:spPr>
+        <p:txBody>
+          <a:bodyPr wrap="square" lIns="0" tIns="0" rIns="0" bIns="0" rtlCol="0" anchor="ctr"/>
+          <a:lstStyle/>
+          <a:p>
+            <a:pPr indent="0" marL="0">
+              <a:buNone/>
+            </a:pPr>
+            <a:r>
+              <a:rPr lang="en-US" sz="2000" b="1" dirty="0">
+                <a:solidFill>
+                  <a:srgbClr val="E8833A"/>
+                </a:solidFill>
+                <a:latin typeface="Cambria" pitchFamily="34" charset="0"/>
+                <a:ea typeface="Cambria" pitchFamily="34" charset="-122"/>
+                <a:cs typeface="Cambria" pitchFamily="34" charset="-120"/>
+              </a:rPr>
+              <a:t>Robusto a los costos</a:t>
+            </a:r>
+            <a:endParaRPr lang="en-US" sz="2000" dirty="0"/>
+          </a:p>
+        </p:txBody>
+      </p:sp>
+      <p:sp>
+        <p:nvSpPr>
+          <p:cNvPr id="11" name="Text 9"/>
+          <p:cNvSpPr/>
+          <p:nvPr/>
+        </p:nvSpPr>
+        <p:spPr>
+          <a:xfrm>
+            <a:off x="1371600" y="4215384"/>
+            <a:ext cx="10058400" cy="548640"/>
+          </a:xfrm>
+          <a:prstGeom prst="rect">
+            <a:avLst/>
+          </a:prstGeom>
+          <a:noFill/>
+          <a:ln/>
+        </p:spPr>
+        <p:txBody>
+          <a:bodyPr wrap="square" lIns="0" tIns="0" rIns="0" bIns="0" rtlCol="0" anchor="ctr"/>
+          <a:lstStyle/>
+          <a:p>
+            <a:pPr indent="0" marL="0">
+              <a:buNone/>
+            </a:pPr>
+            <a:r>
+              <a:rPr lang="en-US" sz="1450" dirty="0">
+                <a:solidFill>
+                  <a:srgbClr val="FFFFFF"/>
+                </a:solidFill>
+                <a:latin typeface="Calibri" pitchFamily="34" charset="0"/>
+                <a:ea typeface="Calibri" pitchFamily="34" charset="-122"/>
+                <a:cs typeface="Calibri" pitchFamily="34" charset="-120"/>
+              </a:rPr>
+              <a:t>El diseño óptimo no cambia ante variaciones de ±30 % en los parámetros económicos.</a:t>
+            </a:r>
+            <a:endParaRPr lang="en-US" sz="1450" dirty="0"/>
+          </a:p>
+        </p:txBody>
+      </p:sp>
+      <p:sp>
+        <p:nvSpPr>
+          <p:cNvPr id="12" name="Shape 10"/>
+          <p:cNvSpPr/>
+          <p:nvPr/>
+        </p:nvSpPr>
+        <p:spPr>
+          <a:xfrm>
+            <a:off x="777240" y="5065776"/>
+            <a:ext cx="384048" cy="384048"/>
+          </a:xfrm>
+          <a:prstGeom prst="ellipse">
+            <a:avLst/>
+          </a:prstGeom>
+          <a:solidFill>
+            <a:srgbClr val="E8833A"/>
+          </a:solidFill>
+          <a:ln/>
+        </p:spPr>
+      </p:sp>
+      <p:sp>
+        <p:nvSpPr>
+          <p:cNvPr id="13" name="Text 11"/>
+          <p:cNvSpPr/>
+          <p:nvPr/>
+        </p:nvSpPr>
+        <p:spPr>
+          <a:xfrm>
+            <a:off x="1371600" y="4974336"/>
+            <a:ext cx="10058400" cy="411480"/>
+          </a:xfrm>
+          <a:prstGeom prst="rect">
+            <a:avLst/>
+          </a:prstGeom>
+          <a:noFill/>
+          <a:ln/>
+        </p:spPr>
+        <p:txBody>
+          <a:bodyPr wrap="square" lIns="0" tIns="0" rIns="0" bIns="0" rtlCol="0" anchor="ctr"/>
+          <a:lstStyle/>
+          <a:p>
+            <a:pPr indent="0" marL="0">
+              <a:buNone/>
+            </a:pPr>
+            <a:r>
+              <a:rPr lang="en-US" sz="2000" b="1" dirty="0">
+                <a:solidFill>
+                  <a:srgbClr val="E8833A"/>
+                </a:solidFill>
+                <a:latin typeface="Cambria" pitchFamily="34" charset="0"/>
+                <a:ea typeface="Cambria" pitchFamily="34" charset="-122"/>
+                <a:cs typeface="Cambria" pitchFamily="34" charset="-120"/>
+              </a:rPr>
+              <a:t>El comportamiento es la palanca fina</a:t>
+            </a:r>
+            <a:endParaRPr lang="en-US" sz="2000" dirty="0"/>
+          </a:p>
+        </p:txBody>
+      </p:sp>
+      <p:sp>
+        <p:nvSpPr>
+          <p:cNvPr id="14" name="Text 12"/>
+          <p:cNvSpPr/>
+          <p:nvPr/>
+        </p:nvSpPr>
+        <p:spPr>
+          <a:xfrm>
+            <a:off x="1371600" y="5385816"/>
+            <a:ext cx="10058400" cy="548640"/>
+          </a:xfrm>
+          <a:prstGeom prst="rect">
+            <a:avLst/>
+          </a:prstGeom>
+          <a:noFill/>
+          <a:ln/>
+        </p:spPr>
+        <p:txBody>
+          <a:bodyPr wrap="square" lIns="0" tIns="0" rIns="0" bIns="0" rtlCol="0" anchor="ctr"/>
+          <a:lstStyle/>
+          <a:p>
+            <a:pPr indent="0" marL="0">
+              <a:buNone/>
+            </a:pPr>
+            <a:r>
+              <a:rPr lang="en-US" sz="1450" dirty="0">
+                <a:solidFill>
+                  <a:srgbClr val="FFFFFF"/>
+                </a:solidFill>
+                <a:latin typeface="Calibri" pitchFamily="34" charset="0"/>
+                <a:ea typeface="Calibri" pitchFamily="34" charset="-122"/>
+                <a:cs typeface="Calibri" pitchFamily="34" charset="-120"/>
+              </a:rPr>
+              <a:t>El tiempo de retiro escala la capacidad requerida: es el factor a monitorear en la operación.</a:t>
+            </a:r>
+            <a:endParaRPr lang="en-US" sz="1450" dirty="0"/>
           </a:p>
         </p:txBody>
       </p:sp>
@@ -1576,7 +2350,6 @@
         <a:solidFill>
           <a:srgbClr val="F4F6FA"/>
         </a:solidFill>
-        <a:effectLst/>
       </p:bgPr>
     </p:bg>
     <p:spTree>
@@ -1614,7 +2387,7 @@
           <a:bodyPr wrap="square" rtlCol="0" anchor="ctr"/>
           <a:lstStyle/>
           <a:p>
-            <a:pPr marL="0" indent="0">
+            <a:pPr indent="0" marL="0">
               <a:buNone/>
             </a:pPr>
             <a:r>
@@ -1653,7 +2426,7 @@
           <a:bodyPr wrap="square" rtlCol="0" anchor="ctr"/>
           <a:lstStyle/>
           <a:p>
-            <a:pPr marL="0" indent="0">
+            <a:pPr indent="0" marL="0">
               <a:buNone/>
             </a:pPr>
             <a:r>
@@ -1697,7 +2470,7 @@
             <a:prstDash val="solid"/>
           </a:ln>
           <a:effectLst>
-            <a:outerShdw blurRad="101600" dist="25400" dir="5400000" algn="bl" rotWithShape="0">
+            <a:outerShdw sx="100000" sy="100000" kx="0" ky="0" algn="bl" rotWithShape="0" blurRad="101600" dist="25400" dir="5400000">
               <a:srgbClr val="9AA5B8">
                 <a:alpha val="25000"/>
               </a:srgbClr>
@@ -1726,7 +2499,7 @@
           <a:bodyPr wrap="square" rtlCol="0" anchor="ctr"/>
           <a:lstStyle/>
           <a:p>
-            <a:pPr marL="0" indent="0" algn="ctr">
+            <a:pPr algn="ctr" indent="0" marL="0">
               <a:buNone/>
             </a:pPr>
             <a:r>
@@ -1765,7 +2538,7 @@
           <a:bodyPr wrap="square" rtlCol="0" anchor="ctr"/>
           <a:lstStyle/>
           <a:p>
-            <a:pPr marL="0" indent="0" algn="ctr">
+            <a:pPr algn="ctr" indent="0" marL="0">
               <a:buNone/>
             </a:pPr>
             <a:r>
@@ -1782,7 +2555,7 @@
             <a:endParaRPr lang="en-US" sz="1300" dirty="0"/>
           </a:p>
           <a:p>
-            <a:pPr marL="0" indent="0" algn="ctr">
+            <a:pPr algn="ctr" indent="0" marL="0">
               <a:buNone/>
             </a:pPr>
             <a:r>
@@ -1826,7 +2599,7 @@
             <a:prstDash val="solid"/>
           </a:ln>
           <a:effectLst>
-            <a:outerShdw blurRad="101600" dist="25400" dir="5400000" algn="bl" rotWithShape="0">
+            <a:outerShdw sx="100000" sy="100000" kx="0" ky="0" algn="bl" rotWithShape="0" blurRad="101600" dist="25400" dir="5400000">
               <a:srgbClr val="9AA5B8">
                 <a:alpha val="25000"/>
               </a:srgbClr>
@@ -1855,7 +2628,7 @@
           <a:bodyPr wrap="square" rtlCol="0" anchor="ctr"/>
           <a:lstStyle/>
           <a:p>
-            <a:pPr marL="0" indent="0" algn="ctr">
+            <a:pPr algn="ctr" indent="0" marL="0">
               <a:buNone/>
             </a:pPr>
             <a:r>
@@ -1894,7 +2667,7 @@
           <a:bodyPr wrap="square" rtlCol="0" anchor="ctr"/>
           <a:lstStyle/>
           <a:p>
-            <a:pPr marL="0" indent="0" algn="ctr">
+            <a:pPr algn="ctr" indent="0" marL="0">
               <a:buNone/>
             </a:pPr>
             <a:r>
@@ -1911,7 +2684,7 @@
             <a:endParaRPr lang="en-US" sz="1300" dirty="0"/>
           </a:p>
           <a:p>
-            <a:pPr marL="0" indent="0" algn="ctr">
+            <a:pPr algn="ctr" indent="0" marL="0">
               <a:buNone/>
             </a:pPr>
             <a:r>
@@ -1955,7 +2728,7 @@
             <a:prstDash val="solid"/>
           </a:ln>
           <a:effectLst>
-            <a:outerShdw blurRad="101600" dist="25400" dir="5400000" algn="bl" rotWithShape="0">
+            <a:outerShdw sx="100000" sy="100000" kx="0" ky="0" algn="bl" rotWithShape="0" blurRad="101600" dist="25400" dir="5400000">
               <a:srgbClr val="9AA5B8">
                 <a:alpha val="25000"/>
               </a:srgbClr>
@@ -1984,7 +2757,7 @@
           <a:bodyPr wrap="square" rtlCol="0" anchor="ctr"/>
           <a:lstStyle/>
           <a:p>
-            <a:pPr marL="0" indent="0" algn="ctr">
+            <a:pPr algn="ctr" indent="0" marL="0">
               <a:buNone/>
             </a:pPr>
             <a:r>
@@ -2023,7 +2796,7 @@
           <a:bodyPr wrap="square" rtlCol="0" anchor="ctr"/>
           <a:lstStyle/>
           <a:p>
-            <a:pPr marL="0" indent="0" algn="ctr">
+            <a:pPr algn="ctr" indent="0" marL="0">
               <a:buNone/>
             </a:pPr>
             <a:r>
@@ -2040,7 +2813,7 @@
             <a:endParaRPr lang="en-US" sz="1300" dirty="0"/>
           </a:p>
           <a:p>
-            <a:pPr marL="0" indent="0" algn="ctr">
+            <a:pPr algn="ctr" indent="0" marL="0">
               <a:buNone/>
             </a:pPr>
             <a:r>
@@ -2101,7 +2874,7 @@
           <a:bodyPr wrap="square" rtlCol="0" anchor="ctr"/>
           <a:lstStyle/>
           <a:p>
-            <a:pPr marL="0" indent="0">
+            <a:pPr indent="0" marL="0">
               <a:buNone/>
             </a:pPr>
             <a:r>
@@ -2140,7 +2913,7 @@
           <a:bodyPr wrap="square" rtlCol="0" anchor="ctr"/>
           <a:lstStyle/>
           <a:p>
-            <a:pPr marL="0" indent="0">
+            <a:pPr indent="0" marL="0">
               <a:buNone/>
             </a:pPr>
             <a:r>
@@ -2174,7 +2947,6 @@
         <a:solidFill>
           <a:srgbClr val="FFFFFF"/>
         </a:solidFill>
-        <a:effectLst/>
       </p:bgPr>
     </p:bg>
     <p:spTree>
@@ -2212,7 +2984,7 @@
           <a:bodyPr wrap="square" rtlCol="0" anchor="ctr"/>
           <a:lstStyle/>
           <a:p>
-            <a:pPr marL="0" indent="0">
+            <a:pPr indent="0" marL="0">
               <a:buNone/>
             </a:pPr>
             <a:r>
@@ -2251,7 +3023,7 @@
           <a:bodyPr wrap="square" rtlCol="0" anchor="ctr"/>
           <a:lstStyle/>
           <a:p>
-            <a:pPr marL="0" indent="0">
+            <a:pPr indent="0" marL="0">
               <a:buNone/>
             </a:pPr>
             <a:r>
@@ -2271,14 +3043,14 @@
       </p:sp>
       <p:pic>
         <p:nvPicPr>
-          <p:cNvPr id="4" name="Image 0" descr="slide_esquema.png"/>
+          <p:cNvPr id="4" name="Image 0" descr="slide_esquema.png">    </p:cNvPr>
           <p:cNvPicPr>
             <a:picLocks noChangeAspect="1"/>
           </p:cNvPicPr>
           <p:nvPr/>
         </p:nvPicPr>
         <p:blipFill>
-          <a:blip r:embed="rId3"/>
+          <a:blip r:embed="rId1"/>
           <a:stretch>
             <a:fillRect/>
           </a:stretch>
@@ -2314,7 +3086,7 @@
           <a:bodyPr wrap="square" rtlCol="0" anchor="ctr"/>
           <a:lstStyle/>
           <a:p>
-            <a:pPr marL="0" indent="0" algn="ctr">
+            <a:pPr algn="ctr" indent="0" marL="0">
               <a:buNone/>
             </a:pPr>
             <a:r>
@@ -2348,7 +3120,6 @@
         <a:solidFill>
           <a:srgbClr val="F4F6FA"/>
         </a:solidFill>
-        <a:effectLst/>
       </p:bgPr>
     </p:bg>
     <p:spTree>
@@ -2386,7 +3157,7 @@
           <a:bodyPr wrap="square" rtlCol="0" anchor="ctr"/>
           <a:lstStyle/>
           <a:p>
-            <a:pPr marL="0" indent="0">
+            <a:pPr indent="0" marL="0">
               <a:buNone/>
             </a:pPr>
             <a:r>
@@ -2398,7 +3169,7 @@
                 <a:ea typeface="Cambria" pitchFamily="34" charset="-122"/>
                 <a:cs typeface="Cambria" pitchFamily="34" charset="-120"/>
               </a:rPr>
-              <a:t>Los datos</a:t>
+              <a:t>Variables del modelo</a:t>
             </a:r>
             <a:endParaRPr lang="en-US" sz="3200" dirty="0"/>
           </a:p>
@@ -2425,7 +3196,7 @@
           <a:bodyPr wrap="square" rtlCol="0" anchor="ctr"/>
           <a:lstStyle/>
           <a:p>
-            <a:pPr marL="0" indent="0">
+            <a:pPr indent="0" marL="0">
               <a:buNone/>
             </a:pPr>
             <a:r>
@@ -2437,50 +3208,26 @@
                 <a:ea typeface="Calibri" pitchFamily="34" charset="-122"/>
                 <a:cs typeface="Calibri" pitchFamily="34" charset="-120"/>
               </a:rPr>
-              <a:t>4 semanas de operación real de una empresa de reparto del AMBA</a:t>
+              <a:t>Clasificadas según la metodología de simulación</a:t>
             </a:r>
             <a:endParaRPr lang="en-US" sz="1500" dirty="0"/>
           </a:p>
         </p:txBody>
       </p:sp>
-      <p:pic>
-        <p:nvPicPr>
-          <p:cNvPr id="4" name="Image 0" descr="slide_datos.png"/>
-          <p:cNvPicPr>
-            <a:picLocks noChangeAspect="1"/>
-          </p:cNvPicPr>
-          <p:nvPr/>
-        </p:nvPicPr>
-        <p:blipFill>
-          <a:blip r:embed="rId3"/>
-          <a:stretch>
-            <a:fillRect/>
-          </a:stretch>
-        </p:blipFill>
-        <p:spPr>
-          <a:xfrm>
-            <a:off x="640080" y="1645920"/>
-            <a:ext cx="6400800" cy="3474720"/>
-          </a:xfrm>
-          <a:prstGeom prst="rect">
-            <a:avLst/>
-          </a:prstGeom>
-        </p:spPr>
-      </p:pic>
-      <p:sp>
-        <p:nvSpPr>
-          <p:cNvPr id="5" name="Shape 2"/>
-          <p:cNvSpPr/>
-          <p:nvPr/>
-        </p:nvSpPr>
-        <p:spPr>
-          <a:xfrm>
-            <a:off x="7406640" y="1737360"/>
-            <a:ext cx="4023360" cy="1600200"/>
+      <p:sp>
+        <p:nvSpPr>
+          <p:cNvPr id="4" name="Shape 2"/>
+          <p:cNvSpPr/>
+          <p:nvPr/>
+        </p:nvSpPr>
+        <p:spPr>
+          <a:xfrm>
+            <a:off x="640080" y="1554480"/>
+            <a:ext cx="5349240" cy="2011680"/>
           </a:xfrm>
           <a:prstGeom prst="roundRect">
             <a:avLst>
-              <a:gd name="adj" fmla="val 5714"/>
+              <a:gd name="adj" fmla="val 4545"/>
             </a:avLst>
           </a:prstGeom>
           <a:solidFill>
@@ -2492,18 +3239,25 @@
             </a:solidFill>
             <a:prstDash val="solid"/>
           </a:ln>
-        </p:spPr>
-      </p:sp>
-      <p:sp>
-        <p:nvSpPr>
-          <p:cNvPr id="6" name="Text 3"/>
-          <p:cNvSpPr/>
-          <p:nvPr/>
-        </p:nvSpPr>
-        <p:spPr>
-          <a:xfrm>
-            <a:off x="7635240" y="1874520"/>
-            <a:ext cx="3566160" cy="320040"/>
+          <a:effectLst>
+            <a:outerShdw sx="100000" sy="100000" kx="0" ky="0" algn="bl" rotWithShape="0" blurRad="88900" dist="25400" dir="5400000">
+              <a:srgbClr val="9AA5B8">
+                <a:alpha val="22000"/>
+              </a:srgbClr>
+            </a:outerShdw>
+          </a:effectLst>
+        </p:spPr>
+      </p:sp>
+      <p:sp>
+        <p:nvSpPr>
+          <p:cNvPr id="5" name="Text 3"/>
+          <p:cNvSpPr/>
+          <p:nvPr/>
+        </p:nvSpPr>
+        <p:spPr>
+          <a:xfrm>
+            <a:off x="896112" y="1700784"/>
+            <a:ext cx="4892040" cy="365760"/>
           </a:xfrm>
           <a:prstGeom prst="rect">
             <a:avLst/>
@@ -2515,19 +3269,19 @@
           <a:bodyPr wrap="square" rtlCol="0" anchor="ctr"/>
           <a:lstStyle/>
           <a:p>
-            <a:pPr marL="0" indent="0">
+            <a:pPr indent="0" marL="0">
               <a:buNone/>
             </a:pPr>
             <a:r>
               <a:rPr lang="en-US" sz="1700" b="1" dirty="0">
                 <a:solidFill>
-                  <a:srgbClr val="E8833A"/>
+                  <a:srgbClr val="7FA6D9"/>
                 </a:solidFill>
                 <a:latin typeface="Cambria" pitchFamily="34" charset="0"/>
                 <a:ea typeface="Cambria" pitchFamily="34" charset="-122"/>
                 <a:cs typeface="Cambria" pitchFamily="34" charset="-120"/>
               </a:rPr>
-              <a:t>Observado</a:t>
+              <a:t>Datos  (entrada)</a:t>
             </a:r>
             <a:endParaRPr lang="en-US" sz="1700" dirty="0"/>
           </a:p>
@@ -2535,30 +3289,34 @@
       </p:sp>
       <p:sp>
         <p:nvSpPr>
-          <p:cNvPr id="7" name="Text 4"/>
-          <p:cNvSpPr/>
-          <p:nvPr/>
-        </p:nvSpPr>
-        <p:spPr>
-          <a:xfrm>
-            <a:off x="7635240" y="2240280"/>
-            <a:ext cx="3566160" cy="914400"/>
-          </a:xfrm>
-          <a:prstGeom prst="rect">
-            <a:avLst/>
-          </a:prstGeom>
-          <a:noFill/>
-          <a:ln/>
-        </p:spPr>
-        <p:txBody>
-          <a:bodyPr wrap="square" rtlCol="0" anchor="ctr"/>
-          <a:lstStyle/>
-          <a:p>
-            <a:pPr marL="0" indent="0">
-              <a:buNone/>
-            </a:pPr>
-            <a:r>
-              <a:rPr lang="en-US" sz="1350" dirty="0">
+          <p:cNvPr id="6" name="Text 4"/>
+          <p:cNvSpPr/>
+          <p:nvPr/>
+        </p:nvSpPr>
+        <p:spPr>
+          <a:xfrm>
+            <a:off x="932688" y="2157984"/>
+            <a:ext cx="4818888" cy="1261872"/>
+          </a:xfrm>
+          <a:prstGeom prst="rect">
+            <a:avLst/>
+          </a:prstGeom>
+          <a:noFill/>
+          <a:ln/>
+        </p:spPr>
+        <p:txBody>
+          <a:bodyPr wrap="square" rtlCol="0" anchor="t"/>
+          <a:lstStyle/>
+          <a:p>
+            <a:pPr marL="342900" indent="-342900">
+              <a:spcAft>
+                <a:spcPts val="400"/>
+              </a:spcAft>
+              <a:buSzPct val="100000"/>
+              <a:buChar char="•"/>
+            </a:pPr>
+            <a:r>
+              <a:rPr lang="en-US" sz="1200" dirty="0">
                 <a:solidFill>
                   <a:srgbClr val="1E2761"/>
                 </a:solidFill>
@@ -2566,26 +3324,89 @@
                 <a:ea typeface="Calibri" pitchFamily="34" charset="-122"/>
                 <a:cs typeface="Calibri" pitchFamily="34" charset="-120"/>
               </a:rPr>
-              <a:t>Inter-arribos de entregas fallidas y distribución de tamaños, por escenario</a:t>
-            </a:r>
-            <a:endParaRPr lang="en-US" sz="1350" dirty="0"/>
-          </a:p>
-        </p:txBody>
-      </p:sp>
-      <p:sp>
-        <p:nvSpPr>
-          <p:cNvPr id="8" name="Shape 5"/>
-          <p:cNvSpPr/>
-          <p:nvPr/>
-        </p:nvSpPr>
-        <p:spPr>
-          <a:xfrm>
-            <a:off x="7406640" y="3520440"/>
-            <a:ext cx="4023360" cy="1600200"/>
+              <a:t>FDP de llegadas, por escenario</a:t>
+            </a:r>
+            <a:endParaRPr lang="en-US" sz="1200" dirty="0"/>
+          </a:p>
+          <a:p>
+            <a:pPr marL="342900" indent="-342900">
+              <a:spcAft>
+                <a:spcPts val="400"/>
+              </a:spcAft>
+              <a:buSzPct val="100000"/>
+              <a:buChar char="•"/>
+            </a:pPr>
+            <a:r>
+              <a:rPr lang="en-US" sz="1200" dirty="0">
+                <a:solidFill>
+                  <a:srgbClr val="1E2761"/>
+                </a:solidFill>
+                <a:latin typeface="Calibri" pitchFamily="34" charset="0"/>
+                <a:ea typeface="Calibri" pitchFamily="34" charset="-122"/>
+                <a:cs typeface="Calibri" pitchFamily="34" charset="-120"/>
+              </a:rPr>
+              <a:t>Tiempo de retiro del usuario (TPR)</a:t>
+            </a:r>
+            <a:endParaRPr lang="en-US" sz="1200" dirty="0"/>
+          </a:p>
+          <a:p>
+            <a:pPr marL="342900" indent="-342900">
+              <a:spcAft>
+                <a:spcPts val="400"/>
+              </a:spcAft>
+              <a:buSzPct val="100000"/>
+              <a:buChar char="•"/>
+            </a:pPr>
+            <a:r>
+              <a:rPr lang="en-US" sz="1200" dirty="0">
+                <a:solidFill>
+                  <a:srgbClr val="1E2761"/>
+                </a:solidFill>
+                <a:latin typeface="Calibri" pitchFamily="34" charset="0"/>
+                <a:ea typeface="Calibri" pitchFamily="34" charset="-122"/>
+                <a:cs typeface="Calibri" pitchFamily="34" charset="-120"/>
+              </a:rPr>
+              <a:t>FDP de devoluciones</a:t>
+            </a:r>
+            <a:endParaRPr lang="en-US" sz="1200" dirty="0"/>
+          </a:p>
+          <a:p>
+            <a:pPr marL="342900" indent="-342900">
+              <a:spcAft>
+                <a:spcPts val="400"/>
+              </a:spcAft>
+              <a:buSzPct val="100000"/>
+              <a:buChar char="•"/>
+            </a:pPr>
+            <a:r>
+              <a:rPr lang="en-US" sz="1200" dirty="0">
+                <a:solidFill>
+                  <a:srgbClr val="1E2761"/>
+                </a:solidFill>
+                <a:latin typeface="Calibri" pitchFamily="34" charset="0"/>
+                <a:ea typeface="Calibri" pitchFamily="34" charset="-122"/>
+                <a:cs typeface="Calibri" pitchFamily="34" charset="-120"/>
+              </a:rPr>
+              <a:t>Distribución de tamaños de paquete</a:t>
+            </a:r>
+            <a:endParaRPr lang="en-US" sz="1200" dirty="0"/>
+          </a:p>
+        </p:txBody>
+      </p:sp>
+      <p:sp>
+        <p:nvSpPr>
+          <p:cNvPr id="7" name="Shape 5"/>
+          <p:cNvSpPr/>
+          <p:nvPr/>
+        </p:nvSpPr>
+        <p:spPr>
+          <a:xfrm>
+            <a:off x="6172200" y="1554480"/>
+            <a:ext cx="5349240" cy="2011680"/>
           </a:xfrm>
           <a:prstGeom prst="roundRect">
             <a:avLst>
-              <a:gd name="adj" fmla="val 5714"/>
+              <a:gd name="adj" fmla="val 4545"/>
             </a:avLst>
           </a:prstGeom>
           <a:solidFill>
@@ -2597,18 +3418,25 @@
             </a:solidFill>
             <a:prstDash val="solid"/>
           </a:ln>
-        </p:spPr>
-      </p:sp>
-      <p:sp>
-        <p:nvSpPr>
-          <p:cNvPr id="9" name="Text 6"/>
-          <p:cNvSpPr/>
-          <p:nvPr/>
-        </p:nvSpPr>
-        <p:spPr>
-          <a:xfrm>
-            <a:off x="7635240" y="3657600"/>
-            <a:ext cx="3566160" cy="320040"/>
+          <a:effectLst>
+            <a:outerShdw sx="100000" sy="100000" kx="0" ky="0" algn="bl" rotWithShape="0" blurRad="88900" dist="25400" dir="5400000">
+              <a:srgbClr val="9AA5B8">
+                <a:alpha val="22000"/>
+              </a:srgbClr>
+            </a:outerShdw>
+          </a:effectLst>
+        </p:spPr>
+      </p:sp>
+      <p:sp>
+        <p:nvSpPr>
+          <p:cNvPr id="8" name="Text 6"/>
+          <p:cNvSpPr/>
+          <p:nvPr/>
+        </p:nvSpPr>
+        <p:spPr>
+          <a:xfrm>
+            <a:off x="6428232" y="1700784"/>
+            <a:ext cx="4892040" cy="365760"/>
           </a:xfrm>
           <a:prstGeom prst="rect">
             <a:avLst/>
@@ -2620,19 +3448,19 @@
           <a:bodyPr wrap="square" rtlCol="0" anchor="ctr"/>
           <a:lstStyle/>
           <a:p>
-            <a:pPr marL="0" indent="0">
+            <a:pPr indent="0" marL="0">
               <a:buNone/>
             </a:pPr>
             <a:r>
               <a:rPr lang="en-US" sz="1700" b="1" dirty="0">
                 <a:solidFill>
-                  <a:srgbClr val="7FA6D9"/>
+                  <a:srgbClr val="E8833A"/>
                 </a:solidFill>
                 <a:latin typeface="Cambria" pitchFamily="34" charset="0"/>
                 <a:ea typeface="Cambria" pitchFamily="34" charset="-122"/>
                 <a:cs typeface="Cambria" pitchFamily="34" charset="-120"/>
               </a:rPr>
-              <a:t>Parametrizado</a:t>
+              <a:t>Control  (lo que optimizamos)</a:t>
             </a:r>
             <a:endParaRPr lang="en-US" sz="1700" dirty="0"/>
           </a:p>
@@ -2640,30 +3468,34 @@
       </p:sp>
       <p:sp>
         <p:nvSpPr>
-          <p:cNvPr id="10" name="Text 7"/>
-          <p:cNvSpPr/>
-          <p:nvPr/>
-        </p:nvSpPr>
-        <p:spPr>
-          <a:xfrm>
-            <a:off x="7635240" y="4023360"/>
-            <a:ext cx="3566160" cy="914400"/>
-          </a:xfrm>
-          <a:prstGeom prst="rect">
-            <a:avLst/>
-          </a:prstGeom>
-          <a:noFill/>
-          <a:ln/>
-        </p:spPr>
-        <p:txBody>
-          <a:bodyPr wrap="square" rtlCol="0" anchor="ctr"/>
-          <a:lstStyle/>
-          <a:p>
-            <a:pPr marL="0" indent="0">
-              <a:buNone/>
-            </a:pPr>
-            <a:r>
-              <a:rPr lang="en-US" sz="1350" dirty="0">
+          <p:cNvPr id="9" name="Text 7"/>
+          <p:cNvSpPr/>
+          <p:nvPr/>
+        </p:nvSpPr>
+        <p:spPr>
+          <a:xfrm>
+            <a:off x="6464808" y="2157984"/>
+            <a:ext cx="4818888" cy="1261872"/>
+          </a:xfrm>
+          <a:prstGeom prst="rect">
+            <a:avLst/>
+          </a:prstGeom>
+          <a:noFill/>
+          <a:ln/>
+        </p:spPr>
+        <p:txBody>
+          <a:bodyPr wrap="square" rtlCol="0" anchor="t"/>
+          <a:lstStyle/>
+          <a:p>
+            <a:pPr marL="342900" indent="-342900">
+              <a:spcAft>
+                <a:spcPts val="400"/>
+              </a:spcAft>
+              <a:buSzPct val="100000"/>
+              <a:buChar char="•"/>
+            </a:pPr>
+            <a:r>
+              <a:rPr lang="en-US" sz="1200" dirty="0">
                 <a:solidFill>
                   <a:srgbClr val="1E2761"/>
                 </a:solidFill>
@@ -2671,38 +3503,20 @@
                 <a:ea typeface="Calibri" pitchFamily="34" charset="-122"/>
                 <a:cs typeface="Calibri" pitchFamily="34" charset="-120"/>
               </a:rPr>
-              <a:t>Tiempo de retiro y devoluciones: no son observables porque la red aún no existe</a:t>
-            </a:r>
-            <a:endParaRPr lang="en-US" sz="1350" dirty="0"/>
-          </a:p>
-        </p:txBody>
-      </p:sp>
-      <p:sp>
-        <p:nvSpPr>
-          <p:cNvPr id="11" name="Text 8"/>
-          <p:cNvSpPr/>
-          <p:nvPr/>
-        </p:nvSpPr>
-        <p:spPr>
-          <a:xfrm>
-            <a:off x="640080" y="5349240"/>
-            <a:ext cx="10881360" cy="365760"/>
-          </a:xfrm>
-          <a:prstGeom prst="rect">
-            <a:avLst/>
-          </a:prstGeom>
-          <a:noFill/>
-          <a:ln/>
-        </p:spPr>
-        <p:txBody>
-          <a:bodyPr wrap="square" rtlCol="0" anchor="ctr"/>
-          <a:lstStyle/>
-          <a:p>
-            <a:pPr marL="0" indent="0">
-              <a:buNone/>
-            </a:pPr>
-            <a:r>
-              <a:rPr lang="en-US" sz="1450" b="1" dirty="0">
+              <a:t>CLTC / CLTM / CLTG — compartimentos por tamaño</a:t>
+            </a:r>
+            <a:endParaRPr lang="en-US" sz="1200" dirty="0"/>
+          </a:p>
+          <a:p>
+            <a:pPr marL="342900" indent="-342900">
+              <a:spcAft>
+                <a:spcPts val="400"/>
+              </a:spcAft>
+              <a:buSzPct val="100000"/>
+              <a:buChar char="•"/>
+            </a:pPr>
+            <a:r>
+              <a:rPr lang="en-US" sz="1200" dirty="0">
                 <a:solidFill>
                   <a:srgbClr val="1E2761"/>
                 </a:solidFill>
@@ -2710,9 +3524,385 @@
                 <a:ea typeface="Calibri" pitchFamily="34" charset="-122"/>
                 <a:cs typeface="Calibri" pitchFamily="34" charset="-120"/>
               </a:rPr>
-              <a:t>Estacionalidad real: Cyber 3,62 min · Normal 4,27 min · Navidad 5,20 min entre fallos</a:t>
-            </a:r>
-            <a:endParaRPr lang="en-US" sz="1450" dirty="0"/>
+              <a:t>TMP — tiempo máximo de permanencia</a:t>
+            </a:r>
+            <a:endParaRPr lang="en-US" sz="1200" dirty="0"/>
+          </a:p>
+          <a:p>
+            <a:pPr marL="342900" indent="-342900">
+              <a:spcAft>
+                <a:spcPts val="400"/>
+              </a:spcAft>
+              <a:buSzPct val="100000"/>
+              <a:buChar char="•"/>
+            </a:pPr>
+            <a:r>
+              <a:rPr lang="en-US" sz="1200" dirty="0">
+                <a:solidFill>
+                  <a:srgbClr val="1E2761"/>
+                </a:solidFill>
+                <a:latin typeface="Calibri" pitchFamily="34" charset="0"/>
+                <a:ea typeface="Calibri" pitchFamily="34" charset="-122"/>
+                <a:cs typeface="Calibri" pitchFamily="34" charset="-120"/>
+              </a:rPr>
+              <a:t>IPC — intervalo de pase del camión</a:t>
+            </a:r>
+            <a:endParaRPr lang="en-US" sz="1200" dirty="0"/>
+          </a:p>
+        </p:txBody>
+      </p:sp>
+      <p:sp>
+        <p:nvSpPr>
+          <p:cNvPr id="10" name="Shape 8"/>
+          <p:cNvSpPr/>
+          <p:nvPr/>
+        </p:nvSpPr>
+        <p:spPr>
+          <a:xfrm>
+            <a:off x="640080" y="3703320"/>
+            <a:ext cx="5349240" cy="2011680"/>
+          </a:xfrm>
+          <a:prstGeom prst="roundRect">
+            <a:avLst>
+              <a:gd name="adj" fmla="val 4545"/>
+            </a:avLst>
+          </a:prstGeom>
+          <a:solidFill>
+            <a:srgbClr val="FFFFFF"/>
+          </a:solidFill>
+          <a:ln w="12700">
+            <a:solidFill>
+              <a:srgbClr val="E2E7F0"/>
+            </a:solidFill>
+            <a:prstDash val="solid"/>
+          </a:ln>
+          <a:effectLst>
+            <a:outerShdw sx="100000" sy="100000" kx="0" ky="0" algn="bl" rotWithShape="0" blurRad="88900" dist="25400" dir="5400000">
+              <a:srgbClr val="9AA5B8">
+                <a:alpha val="22000"/>
+              </a:srgbClr>
+            </a:outerShdw>
+          </a:effectLst>
+        </p:spPr>
+      </p:sp>
+      <p:sp>
+        <p:nvSpPr>
+          <p:cNvPr id="11" name="Text 9"/>
+          <p:cNvSpPr/>
+          <p:nvPr/>
+        </p:nvSpPr>
+        <p:spPr>
+          <a:xfrm>
+            <a:off x="896112" y="3849624"/>
+            <a:ext cx="4892040" cy="365760"/>
+          </a:xfrm>
+          <a:prstGeom prst="rect">
+            <a:avLst/>
+          </a:prstGeom>
+          <a:noFill/>
+          <a:ln/>
+        </p:spPr>
+        <p:txBody>
+          <a:bodyPr wrap="square" rtlCol="0" anchor="ctr"/>
+          <a:lstStyle/>
+          <a:p>
+            <a:pPr indent="0" marL="0">
+              <a:buNone/>
+            </a:pPr>
+            <a:r>
+              <a:rPr lang="en-US" sz="1700" b="1" dirty="0">
+                <a:solidFill>
+                  <a:srgbClr val="3C8C6E"/>
+                </a:solidFill>
+                <a:latin typeface="Cambria" pitchFamily="34" charset="0"/>
+                <a:ea typeface="Cambria" pitchFamily="34" charset="-122"/>
+                <a:cs typeface="Cambria" pitchFamily="34" charset="-120"/>
+              </a:rPr>
+              <a:t>Resultado  (salida)</a:t>
+            </a:r>
+            <a:endParaRPr lang="en-US" sz="1700" dirty="0"/>
+          </a:p>
+        </p:txBody>
+      </p:sp>
+      <p:sp>
+        <p:nvSpPr>
+          <p:cNvPr id="12" name="Text 10"/>
+          <p:cNvSpPr/>
+          <p:nvPr/>
+        </p:nvSpPr>
+        <p:spPr>
+          <a:xfrm>
+            <a:off x="932688" y="4306824"/>
+            <a:ext cx="4818888" cy="1261872"/>
+          </a:xfrm>
+          <a:prstGeom prst="rect">
+            <a:avLst/>
+          </a:prstGeom>
+          <a:noFill/>
+          <a:ln/>
+        </p:spPr>
+        <p:txBody>
+          <a:bodyPr wrap="square" rtlCol="0" anchor="t"/>
+          <a:lstStyle/>
+          <a:p>
+            <a:pPr marL="342900" indent="-342900">
+              <a:spcAft>
+                <a:spcPts val="400"/>
+              </a:spcAft>
+              <a:buSzPct val="100000"/>
+              <a:buChar char="•"/>
+            </a:pPr>
+            <a:r>
+              <a:rPr lang="en-US" sz="1200" dirty="0">
+                <a:solidFill>
+                  <a:srgbClr val="1E2761"/>
+                </a:solidFill>
+                <a:latin typeface="Calibri" pitchFamily="34" charset="0"/>
+                <a:ea typeface="Calibri" pitchFamily="34" charset="-122"/>
+                <a:cs typeface="Calibri" pitchFamily="34" charset="-120"/>
+              </a:rPr>
+              <a:t>CPE — costo por paquete entregado (objetivo)</a:t>
+            </a:r>
+            <a:endParaRPr lang="en-US" sz="1200" dirty="0"/>
+          </a:p>
+          <a:p>
+            <a:pPr marL="342900" indent="-342900">
+              <a:spcAft>
+                <a:spcPts val="400"/>
+              </a:spcAft>
+              <a:buSzPct val="100000"/>
+              <a:buChar char="•"/>
+            </a:pPr>
+            <a:r>
+              <a:rPr lang="en-US" sz="1200" dirty="0">
+                <a:solidFill>
+                  <a:srgbClr val="1E2761"/>
+                </a:solidFill>
+                <a:latin typeface="Calibri" pitchFamily="34" charset="0"/>
+                <a:ea typeface="Calibri" pitchFamily="34" charset="-122"/>
+                <a:cs typeface="Calibri" pitchFamily="34" charset="-120"/>
+              </a:rPr>
+              <a:t>EF % — entregas fallidas · PPV % — vencidos</a:t>
+            </a:r>
+            <a:endParaRPr lang="en-US" sz="1200" dirty="0"/>
+          </a:p>
+          <a:p>
+            <a:pPr marL="342900" indent="-342900">
+              <a:spcAft>
+                <a:spcPts val="400"/>
+              </a:spcAft>
+              <a:buSzPct val="100000"/>
+              <a:buChar char="•"/>
+            </a:pPr>
+            <a:r>
+              <a:rPr lang="en-US" sz="1200" dirty="0">
+                <a:solidFill>
+                  <a:srgbClr val="1E2761"/>
+                </a:solidFill>
+                <a:latin typeface="Calibri" pitchFamily="34" charset="0"/>
+                <a:ea typeface="Calibri" pitchFamily="34" charset="-122"/>
+                <a:cs typeface="Calibri" pitchFamily="34" charset="-120"/>
+              </a:rPr>
+              <a:t>CI — clientes insatisfechos · EO — espacio ocioso</a:t>
+            </a:r>
+            <a:endParaRPr lang="en-US" sz="1200" dirty="0"/>
+          </a:p>
+        </p:txBody>
+      </p:sp>
+      <p:sp>
+        <p:nvSpPr>
+          <p:cNvPr id="13" name="Shape 11"/>
+          <p:cNvSpPr/>
+          <p:nvPr/>
+        </p:nvSpPr>
+        <p:spPr>
+          <a:xfrm>
+            <a:off x="6172200" y="3703320"/>
+            <a:ext cx="5349240" cy="2011680"/>
+          </a:xfrm>
+          <a:prstGeom prst="roundRect">
+            <a:avLst>
+              <a:gd name="adj" fmla="val 4545"/>
+            </a:avLst>
+          </a:prstGeom>
+          <a:solidFill>
+            <a:srgbClr val="FFFFFF"/>
+          </a:solidFill>
+          <a:ln w="12700">
+            <a:solidFill>
+              <a:srgbClr val="E2E7F0"/>
+            </a:solidFill>
+            <a:prstDash val="solid"/>
+          </a:ln>
+          <a:effectLst>
+            <a:outerShdw sx="100000" sy="100000" kx="0" ky="0" algn="bl" rotWithShape="0" blurRad="88900" dist="25400" dir="5400000">
+              <a:srgbClr val="9AA5B8">
+                <a:alpha val="22000"/>
+              </a:srgbClr>
+            </a:outerShdw>
+          </a:effectLst>
+        </p:spPr>
+      </p:sp>
+      <p:sp>
+        <p:nvSpPr>
+          <p:cNvPr id="14" name="Text 12"/>
+          <p:cNvSpPr/>
+          <p:nvPr/>
+        </p:nvSpPr>
+        <p:spPr>
+          <a:xfrm>
+            <a:off x="6428232" y="3849624"/>
+            <a:ext cx="4892040" cy="365760"/>
+          </a:xfrm>
+          <a:prstGeom prst="rect">
+            <a:avLst/>
+          </a:prstGeom>
+          <a:noFill/>
+          <a:ln/>
+        </p:spPr>
+        <p:txBody>
+          <a:bodyPr wrap="square" rtlCol="0" anchor="ctr"/>
+          <a:lstStyle/>
+          <a:p>
+            <a:pPr indent="0" marL="0">
+              <a:buNone/>
+            </a:pPr>
+            <a:r>
+              <a:rPr lang="en-US" sz="1700" b="1" dirty="0">
+                <a:solidFill>
+                  <a:srgbClr val="1E2761"/>
+                </a:solidFill>
+                <a:latin typeface="Cambria" pitchFamily="34" charset="0"/>
+                <a:ea typeface="Cambria" pitchFamily="34" charset="-122"/>
+                <a:cs typeface="Cambria" pitchFamily="34" charset="-120"/>
+              </a:rPr>
+              <a:t>Estado</a:t>
+            </a:r>
+            <a:endParaRPr lang="en-US" sz="1700" dirty="0"/>
+          </a:p>
+        </p:txBody>
+      </p:sp>
+      <p:sp>
+        <p:nvSpPr>
+          <p:cNvPr id="15" name="Text 13"/>
+          <p:cNvSpPr/>
+          <p:nvPr/>
+        </p:nvSpPr>
+        <p:spPr>
+          <a:xfrm>
+            <a:off x="6464808" y="4306824"/>
+            <a:ext cx="4818888" cy="1261872"/>
+          </a:xfrm>
+          <a:prstGeom prst="rect">
+            <a:avLst/>
+          </a:prstGeom>
+          <a:noFill/>
+          <a:ln/>
+        </p:spPr>
+        <p:txBody>
+          <a:bodyPr wrap="square" rtlCol="0" anchor="t"/>
+          <a:lstStyle/>
+          <a:p>
+            <a:pPr marL="342900" indent="-342900">
+              <a:spcAft>
+                <a:spcPts val="400"/>
+              </a:spcAft>
+              <a:buSzPct val="100000"/>
+              <a:buChar char="•"/>
+            </a:pPr>
+            <a:r>
+              <a:rPr lang="en-US" sz="1200" dirty="0">
+                <a:solidFill>
+                  <a:srgbClr val="1E2761"/>
+                </a:solidFill>
+                <a:latin typeface="Calibri" pitchFamily="34" charset="0"/>
+                <a:ea typeface="Calibri" pitchFamily="34" charset="-122"/>
+                <a:cs typeface="Calibri" pitchFamily="34" charset="-120"/>
+              </a:rPr>
+              <a:t>DispPaqC/M/G — HV libre · 1 normal · 2 devolución</a:t>
+            </a:r>
+            <a:endParaRPr lang="en-US" sz="1200" dirty="0"/>
+          </a:p>
+          <a:p>
+            <a:pPr marL="342900" indent="-342900">
+              <a:spcAft>
+                <a:spcPts val="400"/>
+              </a:spcAft>
+              <a:buSzPct val="100000"/>
+              <a:buChar char="•"/>
+            </a:pPr>
+            <a:r>
+              <a:rPr lang="en-US" sz="1200" dirty="0">
+                <a:solidFill>
+                  <a:srgbClr val="1E2761"/>
+                </a:solidFill>
+                <a:latin typeface="Calibri" pitchFamily="34" charset="0"/>
+                <a:ea typeface="Calibri" pitchFamily="34" charset="-122"/>
+                <a:cs typeface="Calibri" pitchFamily="34" charset="-120"/>
+              </a:rPr>
+              <a:t>TOL — tiempo de ocupación del compartimento</a:t>
+            </a:r>
+            <a:endParaRPr lang="en-US" sz="1200" dirty="0"/>
+          </a:p>
+          <a:p>
+            <a:pPr marL="342900" indent="-342900">
+              <a:spcAft>
+                <a:spcPts val="400"/>
+              </a:spcAft>
+              <a:buSzPct val="100000"/>
+              <a:buChar char="•"/>
+            </a:pPr>
+            <a:r>
+              <a:rPr lang="en-US" sz="1200" dirty="0">
+                <a:solidFill>
+                  <a:srgbClr val="1E2761"/>
+                </a:solidFill>
+                <a:latin typeface="Calibri" pitchFamily="34" charset="0"/>
+                <a:ea typeface="Calibri" pitchFamily="34" charset="-122"/>
+                <a:cs typeface="Calibri" pitchFamily="34" charset="-120"/>
+              </a:rPr>
+              <a:t>TPR — próximo retiro programado</a:t>
+            </a:r>
+            <a:endParaRPr lang="en-US" sz="1200" dirty="0"/>
+          </a:p>
+        </p:txBody>
+      </p:sp>
+      <p:sp>
+        <p:nvSpPr>
+          <p:cNvPr id="16" name="Text 14"/>
+          <p:cNvSpPr/>
+          <p:nvPr/>
+        </p:nvSpPr>
+        <p:spPr>
+          <a:xfrm>
+            <a:off x="640080" y="5897880"/>
+            <a:ext cx="10881360" cy="365760"/>
+          </a:xfrm>
+          <a:prstGeom prst="rect">
+            <a:avLst/>
+          </a:prstGeom>
+          <a:noFill/>
+          <a:ln/>
+        </p:spPr>
+        <p:txBody>
+          <a:bodyPr wrap="square" rtlCol="0" anchor="ctr"/>
+          <a:lstStyle/>
+          <a:p>
+            <a:pPr algn="ctr" indent="0" marL="0">
+              <a:buNone/>
+            </a:pPr>
+            <a:r>
+              <a:rPr lang="en-US" sz="1350" b="1" dirty="0">
+                <a:solidFill>
+                  <a:srgbClr val="1E2761"/>
+                </a:solidFill>
+                <a:latin typeface="Calibri" pitchFamily="34" charset="0"/>
+                <a:ea typeface="Calibri" pitchFamily="34" charset="-122"/>
+                <a:cs typeface="Calibri" pitchFamily="34" charset="-120"/>
+              </a:rPr>
+              <a:t>Optimizamos las variables de CONTROL para minimizar el CPE (variable de resultado).</a:t>
+            </a:r>
+            <a:endParaRPr lang="en-US" sz="1350" dirty="0"/>
           </a:p>
         </p:txBody>
       </p:sp>
@@ -2730,9 +3920,8 @@
     <p:bg>
       <p:bgPr>
         <a:solidFill>
-          <a:srgbClr val="FFFFFF"/>
+          <a:srgbClr val="F4F6FA"/>
         </a:solidFill>
-        <a:effectLst/>
       </p:bgPr>
     </p:bg>
     <p:spTree>
@@ -2770,7 +3959,7 @@
           <a:bodyPr wrap="square" rtlCol="0" anchor="ctr"/>
           <a:lstStyle/>
           <a:p>
-            <a:pPr marL="0" indent="0">
+            <a:pPr indent="0" marL="0">
               <a:buNone/>
             </a:pPr>
             <a:r>
@@ -2782,7 +3971,7 @@
                 <a:ea typeface="Cambria" pitchFamily="34" charset="-122"/>
                 <a:cs typeface="Cambria" pitchFamily="34" charset="-120"/>
               </a:rPr>
-              <a:t>Cómo lo resolvimos</a:t>
+              <a:t>Los datos</a:t>
             </a:r>
             <a:endParaRPr lang="en-US" sz="3200" dirty="0"/>
           </a:p>
@@ -2790,34 +3979,104 @@
       </p:sp>
       <p:sp>
         <p:nvSpPr>
-          <p:cNvPr id="3" name="Shape 1"/>
-          <p:cNvSpPr/>
-          <p:nvPr/>
-        </p:nvSpPr>
-        <p:spPr>
-          <a:xfrm>
-            <a:off x="822960" y="1673352"/>
-            <a:ext cx="566928" cy="566928"/>
-          </a:xfrm>
-          <a:prstGeom prst="ellipse">
-            <a:avLst/>
+          <p:cNvPr id="3" name="Text 1"/>
+          <p:cNvSpPr/>
+          <p:nvPr/>
+        </p:nvSpPr>
+        <p:spPr>
+          <a:xfrm>
+            <a:off x="548640" y="1024128"/>
+            <a:ext cx="11064240" cy="365760"/>
+          </a:xfrm>
+          <a:prstGeom prst="rect">
+            <a:avLst/>
+          </a:prstGeom>
+          <a:noFill/>
+          <a:ln/>
+        </p:spPr>
+        <p:txBody>
+          <a:bodyPr wrap="square" rtlCol="0" anchor="ctr"/>
+          <a:lstStyle/>
+          <a:p>
+            <a:pPr indent="0" marL="0">
+              <a:buNone/>
+            </a:pPr>
+            <a:r>
+              <a:rPr lang="en-US" sz="1500" dirty="0">
+                <a:solidFill>
+                  <a:srgbClr val="5A6478"/>
+                </a:solidFill>
+                <a:latin typeface="Calibri" pitchFamily="34" charset="0"/>
+                <a:ea typeface="Calibri" pitchFamily="34" charset="-122"/>
+                <a:cs typeface="Calibri" pitchFamily="34" charset="-120"/>
+              </a:rPr>
+              <a:t>4 semanas de operación real de una empresa de reparto del AMBA</a:t>
+            </a:r>
+            <a:endParaRPr lang="en-US" sz="1500" dirty="0"/>
+          </a:p>
+        </p:txBody>
+      </p:sp>
+      <p:pic>
+        <p:nvPicPr>
+          <p:cNvPr id="4" name="Image 0" descr="slide_datos.png">    </p:cNvPr>
+          <p:cNvPicPr>
+            <a:picLocks noChangeAspect="1"/>
+          </p:cNvPicPr>
+          <p:nvPr/>
+        </p:nvPicPr>
+        <p:blipFill>
+          <a:blip r:embed="rId1"/>
+          <a:stretch>
+            <a:fillRect/>
+          </a:stretch>
+        </p:blipFill>
+        <p:spPr>
+          <a:xfrm>
+            <a:off x="640080" y="1645920"/>
+            <a:ext cx="6400800" cy="3474720"/>
+          </a:xfrm>
+          <a:prstGeom prst="rect">
+            <a:avLst/>
+          </a:prstGeom>
+        </p:spPr>
+      </p:pic>
+      <p:sp>
+        <p:nvSpPr>
+          <p:cNvPr id="5" name="Shape 2"/>
+          <p:cNvSpPr/>
+          <p:nvPr/>
+        </p:nvSpPr>
+        <p:spPr>
+          <a:xfrm>
+            <a:off x="7406640" y="1737360"/>
+            <a:ext cx="4023360" cy="1600200"/>
+          </a:xfrm>
+          <a:prstGeom prst="roundRect">
+            <a:avLst>
+              <a:gd name="adj" fmla="val 5714"/>
+            </a:avLst>
           </a:prstGeom>
           <a:solidFill>
-            <a:srgbClr val="E8833A"/>
+            <a:srgbClr val="FFFFFF"/>
           </a:solidFill>
-          <a:ln/>
-        </p:spPr>
-      </p:sp>
-      <p:sp>
-        <p:nvSpPr>
-          <p:cNvPr id="4" name="Text 2"/>
-          <p:cNvSpPr/>
-          <p:nvPr/>
-        </p:nvSpPr>
-        <p:spPr>
-          <a:xfrm>
-            <a:off x="822960" y="1673352"/>
-            <a:ext cx="566928" cy="566928"/>
+          <a:ln w="12700">
+            <a:solidFill>
+              <a:srgbClr val="E2E7F0"/>
+            </a:solidFill>
+            <a:prstDash val="solid"/>
+          </a:ln>
+        </p:spPr>
+      </p:sp>
+      <p:sp>
+        <p:nvSpPr>
+          <p:cNvPr id="6" name="Text 3"/>
+          <p:cNvSpPr/>
+          <p:nvPr/>
+        </p:nvSpPr>
+        <p:spPr>
+          <a:xfrm>
+            <a:off x="7635240" y="1874520"/>
+            <a:ext cx="3566160" cy="320040"/>
           </a:xfrm>
           <a:prstGeom prst="rect">
             <a:avLst/>
@@ -2829,132 +4088,178 @@
           <a:bodyPr wrap="square" rtlCol="0" anchor="ctr"/>
           <a:lstStyle/>
           <a:p>
-            <a:pPr marL="0" indent="0" algn="ctr">
-              <a:buNone/>
-            </a:pPr>
-            <a:r>
-              <a:rPr lang="en-US" sz="2000" b="1" dirty="0">
-                <a:solidFill>
-                  <a:srgbClr val="FFFFFF"/>
+            <a:pPr indent="0" marL="0">
+              <a:buNone/>
+            </a:pPr>
+            <a:r>
+              <a:rPr lang="en-US" sz="1700" b="1" dirty="0">
+                <a:solidFill>
+                  <a:srgbClr val="E8833A"/>
                 </a:solidFill>
                 <a:latin typeface="Cambria" pitchFamily="34" charset="0"/>
                 <a:ea typeface="Cambria" pitchFamily="34" charset="-122"/>
                 <a:cs typeface="Cambria" pitchFamily="34" charset="-120"/>
               </a:rPr>
-              <a:t>1</a:t>
-            </a:r>
-            <a:endParaRPr lang="en-US" sz="2000" dirty="0"/>
-          </a:p>
-        </p:txBody>
-      </p:sp>
-      <p:sp>
-        <p:nvSpPr>
-          <p:cNvPr id="5" name="Text 3"/>
-          <p:cNvSpPr/>
-          <p:nvPr/>
-        </p:nvSpPr>
-        <p:spPr>
-          <a:xfrm>
-            <a:off x="1600200" y="1600200"/>
-            <a:ext cx="4572000" cy="384048"/>
-          </a:xfrm>
-          <a:prstGeom prst="rect">
-            <a:avLst/>
-          </a:prstGeom>
-          <a:noFill/>
-          <a:ln/>
-        </p:spPr>
-        <p:txBody>
-          <a:bodyPr wrap="square" lIns="0" tIns="0" rIns="0" bIns="0" rtlCol="0" anchor="ctr"/>
-          <a:lstStyle/>
-          <a:p>
-            <a:pPr marL="0" indent="0">
-              <a:buNone/>
-            </a:pPr>
-            <a:r>
-              <a:rPr lang="en-US" sz="1900" b="1" dirty="0">
+              <a:t>Llegadas y tamaños</a:t>
+            </a:r>
+            <a:endParaRPr lang="en-US" sz="1700" dirty="0"/>
+          </a:p>
+        </p:txBody>
+      </p:sp>
+      <p:sp>
+        <p:nvSpPr>
+          <p:cNvPr id="7" name="Text 4"/>
+          <p:cNvSpPr/>
+          <p:nvPr/>
+        </p:nvSpPr>
+        <p:spPr>
+          <a:xfrm>
+            <a:off x="7635240" y="2240280"/>
+            <a:ext cx="3566160" cy="914400"/>
+          </a:xfrm>
+          <a:prstGeom prst="rect">
+            <a:avLst/>
+          </a:prstGeom>
+          <a:noFill/>
+          <a:ln/>
+        </p:spPr>
+        <p:txBody>
+          <a:bodyPr wrap="square" rtlCol="0" anchor="ctr"/>
+          <a:lstStyle/>
+          <a:p>
+            <a:pPr indent="0" marL="0">
+              <a:buNone/>
+            </a:pPr>
+            <a:r>
+              <a:rPr lang="en-US" sz="1350" dirty="0">
                 <a:solidFill>
                   <a:srgbClr val="1E2761"/>
+                </a:solidFill>
+                <a:latin typeface="Calibri" pitchFamily="34" charset="0"/>
+                <a:ea typeface="Calibri" pitchFamily="34" charset="-122"/>
+                <a:cs typeface="Calibri" pitchFamily="34" charset="-120"/>
+              </a:rPr>
+              <a:t>Inter-arribos de entregas fallidas y distribución de tamaños de paquete, por escenario</a:t>
+            </a:r>
+            <a:endParaRPr lang="en-US" sz="1350" dirty="0"/>
+          </a:p>
+        </p:txBody>
+      </p:sp>
+      <p:sp>
+        <p:nvSpPr>
+          <p:cNvPr id="8" name="Shape 5"/>
+          <p:cNvSpPr/>
+          <p:nvPr/>
+        </p:nvSpPr>
+        <p:spPr>
+          <a:xfrm>
+            <a:off x="7406640" y="3520440"/>
+            <a:ext cx="4023360" cy="1600200"/>
+          </a:xfrm>
+          <a:prstGeom prst="roundRect">
+            <a:avLst>
+              <a:gd name="adj" fmla="val 5714"/>
+            </a:avLst>
+          </a:prstGeom>
+          <a:solidFill>
+            <a:srgbClr val="FFFFFF"/>
+          </a:solidFill>
+          <a:ln w="12700">
+            <a:solidFill>
+              <a:srgbClr val="E2E7F0"/>
+            </a:solidFill>
+            <a:prstDash val="solid"/>
+          </a:ln>
+        </p:spPr>
+      </p:sp>
+      <p:sp>
+        <p:nvSpPr>
+          <p:cNvPr id="9" name="Text 6"/>
+          <p:cNvSpPr/>
+          <p:nvPr/>
+        </p:nvSpPr>
+        <p:spPr>
+          <a:xfrm>
+            <a:off x="7635240" y="3657600"/>
+            <a:ext cx="3566160" cy="320040"/>
+          </a:xfrm>
+          <a:prstGeom prst="rect">
+            <a:avLst/>
+          </a:prstGeom>
+          <a:noFill/>
+          <a:ln/>
+        </p:spPr>
+        <p:txBody>
+          <a:bodyPr wrap="square" rtlCol="0" anchor="ctr"/>
+          <a:lstStyle/>
+          <a:p>
+            <a:pPr indent="0" marL="0">
+              <a:buNone/>
+            </a:pPr>
+            <a:r>
+              <a:rPr lang="en-US" sz="1700" b="1" dirty="0">
+                <a:solidFill>
+                  <a:srgbClr val="7FA6D9"/>
                 </a:solidFill>
                 <a:latin typeface="Cambria" pitchFamily="34" charset="0"/>
                 <a:ea typeface="Cambria" pitchFamily="34" charset="-122"/>
                 <a:cs typeface="Cambria" pitchFamily="34" charset="-120"/>
               </a:rPr>
-              <a:t>Motor evento a evento</a:t>
-            </a:r>
-            <a:endParaRPr lang="en-US" sz="1900" dirty="0"/>
-          </a:p>
-        </p:txBody>
-      </p:sp>
-      <p:sp>
-        <p:nvSpPr>
-          <p:cNvPr id="6" name="Text 4"/>
-          <p:cNvSpPr/>
-          <p:nvPr/>
-        </p:nvSpPr>
-        <p:spPr>
-          <a:xfrm>
-            <a:off x="1600200" y="1984248"/>
-            <a:ext cx="9601200" cy="365760"/>
-          </a:xfrm>
-          <a:prstGeom prst="rect">
-            <a:avLst/>
-          </a:prstGeom>
-          <a:noFill/>
-          <a:ln/>
-        </p:spPr>
-        <p:txBody>
-          <a:bodyPr wrap="square" lIns="0" tIns="0" rIns="0" bIns="0" rtlCol="0" anchor="ctr"/>
-          <a:lstStyle/>
-          <a:p>
-            <a:pPr marL="0" indent="0">
-              <a:buNone/>
-            </a:pPr>
-            <a:r>
-              <a:rPr lang="en-US" sz="1400" dirty="0">
-                <a:solidFill>
-                  <a:srgbClr val="5A6478"/>
+              <a:t>Comportamiento</a:t>
+            </a:r>
+            <a:endParaRPr lang="en-US" sz="1700" dirty="0"/>
+          </a:p>
+        </p:txBody>
+      </p:sp>
+      <p:sp>
+        <p:nvSpPr>
+          <p:cNvPr id="10" name="Text 7"/>
+          <p:cNvSpPr/>
+          <p:nvPr/>
+        </p:nvSpPr>
+        <p:spPr>
+          <a:xfrm>
+            <a:off x="7635240" y="4023360"/>
+            <a:ext cx="3566160" cy="914400"/>
+          </a:xfrm>
+          <a:prstGeom prst="rect">
+            <a:avLst/>
+          </a:prstGeom>
+          <a:noFill/>
+          <a:ln/>
+        </p:spPr>
+        <p:txBody>
+          <a:bodyPr wrap="square" rtlCol="0" anchor="ctr"/>
+          <a:lstStyle/>
+          <a:p>
+            <a:pPr indent="0" marL="0">
+              <a:buNone/>
+            </a:pPr>
+            <a:r>
+              <a:rPr lang="en-US" sz="1350" dirty="0">
+                <a:solidFill>
+                  <a:srgbClr val="1E2761"/>
                 </a:solidFill>
                 <a:latin typeface="Calibri" pitchFamily="34" charset="0"/>
                 <a:ea typeface="Calibri" pitchFamily="34" charset="-122"/>
                 <a:cs typeface="Calibri" pitchFamily="34" charset="-120"/>
               </a:rPr>
-              <a:t>Implementado a medida, sin librerías de simulación</a:t>
-            </a:r>
-            <a:endParaRPr lang="en-US" sz="1400" dirty="0"/>
-          </a:p>
-        </p:txBody>
-      </p:sp>
-      <p:sp>
-        <p:nvSpPr>
-          <p:cNvPr id="7" name="Shape 5"/>
-          <p:cNvSpPr/>
-          <p:nvPr/>
-        </p:nvSpPr>
-        <p:spPr>
-          <a:xfrm>
-            <a:off x="822960" y="2816352"/>
-            <a:ext cx="566928" cy="566928"/>
-          </a:xfrm>
-          <a:prstGeom prst="ellipse">
-            <a:avLst/>
-          </a:prstGeom>
-          <a:solidFill>
-            <a:srgbClr val="E8833A"/>
-          </a:solidFill>
-          <a:ln/>
-        </p:spPr>
-      </p:sp>
-      <p:sp>
-        <p:nvSpPr>
-          <p:cNvPr id="8" name="Text 6"/>
-          <p:cNvSpPr/>
-          <p:nvPr/>
-        </p:nvSpPr>
-        <p:spPr>
-          <a:xfrm>
-            <a:off x="822960" y="2816352"/>
-            <a:ext cx="566928" cy="566928"/>
+              <a:t>Tiempo de retiro del usuario y devoluciones (logística inversa) como entradas del modelo</a:t>
+            </a:r>
+            <a:endParaRPr lang="en-US" sz="1350" dirty="0"/>
+          </a:p>
+        </p:txBody>
+      </p:sp>
+      <p:sp>
+        <p:nvSpPr>
+          <p:cNvPr id="11" name="Text 8"/>
+          <p:cNvSpPr/>
+          <p:nvPr/>
+        </p:nvSpPr>
+        <p:spPr>
+          <a:xfrm>
+            <a:off x="640080" y="5349240"/>
+            <a:ext cx="10881360" cy="365760"/>
           </a:xfrm>
           <a:prstGeom prst="rect">
             <a:avLst/>
@@ -2966,412 +4271,21 @@
           <a:bodyPr wrap="square" rtlCol="0" anchor="ctr"/>
           <a:lstStyle/>
           <a:p>
-            <a:pPr marL="0" indent="0" algn="ctr">
-              <a:buNone/>
-            </a:pPr>
-            <a:r>
-              <a:rPr lang="en-US" sz="2000" b="1" dirty="0">
-                <a:solidFill>
-                  <a:srgbClr val="FFFFFF"/>
-                </a:solidFill>
-                <a:latin typeface="Cambria" pitchFamily="34" charset="0"/>
-                <a:ea typeface="Cambria" pitchFamily="34" charset="-122"/>
-                <a:cs typeface="Cambria" pitchFamily="34" charset="-120"/>
-              </a:rPr>
-              <a:t>2</a:t>
-            </a:r>
-            <a:endParaRPr lang="en-US" sz="2000" dirty="0"/>
-          </a:p>
-        </p:txBody>
-      </p:sp>
-      <p:sp>
-        <p:nvSpPr>
-          <p:cNvPr id="9" name="Text 7"/>
-          <p:cNvSpPr/>
-          <p:nvPr/>
-        </p:nvSpPr>
-        <p:spPr>
-          <a:xfrm>
-            <a:off x="1600200" y="2743200"/>
-            <a:ext cx="4572000" cy="384048"/>
-          </a:xfrm>
-          <a:prstGeom prst="rect">
-            <a:avLst/>
-          </a:prstGeom>
-          <a:noFill/>
-          <a:ln/>
-        </p:spPr>
-        <p:txBody>
-          <a:bodyPr wrap="square" lIns="0" tIns="0" rIns="0" bIns="0" rtlCol="0" anchor="ctr"/>
-          <a:lstStyle/>
-          <a:p>
-            <a:pPr marL="0" indent="0">
-              <a:buNone/>
-            </a:pPr>
-            <a:r>
-              <a:rPr lang="en-US" sz="1900" b="1" dirty="0">
+            <a:pPr indent="0" marL="0">
+              <a:buNone/>
+            </a:pPr>
+            <a:r>
+              <a:rPr lang="en-US" sz="1450" b="1" dirty="0">
                 <a:solidFill>
                   <a:srgbClr val="1E2761"/>
-                </a:solidFill>
-                <a:latin typeface="Cambria" pitchFamily="34" charset="0"/>
-                <a:ea typeface="Cambria" pitchFamily="34" charset="-122"/>
-                <a:cs typeface="Cambria" pitchFamily="34" charset="-120"/>
-              </a:rPr>
-              <a:t>30 réplicas + IC 95 %</a:t>
-            </a:r>
-            <a:endParaRPr lang="en-US" sz="1900" dirty="0"/>
-          </a:p>
-        </p:txBody>
-      </p:sp>
-      <p:sp>
-        <p:nvSpPr>
-          <p:cNvPr id="10" name="Text 8"/>
-          <p:cNvSpPr/>
-          <p:nvPr/>
-        </p:nvSpPr>
-        <p:spPr>
-          <a:xfrm>
-            <a:off x="1600200" y="3127248"/>
-            <a:ext cx="9601200" cy="365760"/>
-          </a:xfrm>
-          <a:prstGeom prst="rect">
-            <a:avLst/>
-          </a:prstGeom>
-          <a:noFill/>
-          <a:ln/>
-        </p:spPr>
-        <p:txBody>
-          <a:bodyPr wrap="square" lIns="0" tIns="0" rIns="0" bIns="0" rtlCol="0" anchor="ctr"/>
-          <a:lstStyle/>
-          <a:p>
-            <a:pPr marL="0" indent="0">
-              <a:buNone/>
-            </a:pPr>
-            <a:r>
-              <a:rPr lang="en-US" sz="1400" dirty="0">
-                <a:solidFill>
-                  <a:srgbClr val="5A6478"/>
                 </a:solidFill>
                 <a:latin typeface="Calibri" pitchFamily="34" charset="0"/>
                 <a:ea typeface="Calibri" pitchFamily="34" charset="-122"/>
                 <a:cs typeface="Calibri" pitchFamily="34" charset="-120"/>
               </a:rPr>
-              <a:t>Cada configuración se informa con su intervalo de confianza</a:t>
-            </a:r>
-            <a:endParaRPr lang="en-US" sz="1400" dirty="0"/>
-          </a:p>
-        </p:txBody>
-      </p:sp>
-      <p:sp>
-        <p:nvSpPr>
-          <p:cNvPr id="11" name="Shape 9"/>
-          <p:cNvSpPr/>
-          <p:nvPr/>
-        </p:nvSpPr>
-        <p:spPr>
-          <a:xfrm>
-            <a:off x="822960" y="3959352"/>
-            <a:ext cx="566928" cy="566928"/>
-          </a:xfrm>
-          <a:prstGeom prst="ellipse">
-            <a:avLst/>
-          </a:prstGeom>
-          <a:solidFill>
-            <a:srgbClr val="E8833A"/>
-          </a:solidFill>
-          <a:ln/>
-        </p:spPr>
-      </p:sp>
-      <p:sp>
-        <p:nvSpPr>
-          <p:cNvPr id="12" name="Text 10"/>
-          <p:cNvSpPr/>
-          <p:nvPr/>
-        </p:nvSpPr>
-        <p:spPr>
-          <a:xfrm>
-            <a:off x="822960" y="3959352"/>
-            <a:ext cx="566928" cy="566928"/>
-          </a:xfrm>
-          <a:prstGeom prst="rect">
-            <a:avLst/>
-          </a:prstGeom>
-          <a:noFill/>
-          <a:ln/>
-        </p:spPr>
-        <p:txBody>
-          <a:bodyPr wrap="square" rtlCol="0" anchor="ctr"/>
-          <a:lstStyle/>
-          <a:p>
-            <a:pPr marL="0" indent="0" algn="ctr">
-              <a:buNone/>
-            </a:pPr>
-            <a:r>
-              <a:rPr lang="en-US" sz="2000" b="1" dirty="0">
-                <a:solidFill>
-                  <a:srgbClr val="FFFFFF"/>
-                </a:solidFill>
-                <a:latin typeface="Cambria" pitchFamily="34" charset="0"/>
-                <a:ea typeface="Cambria" pitchFamily="34" charset="-122"/>
-                <a:cs typeface="Cambria" pitchFamily="34" charset="-120"/>
-              </a:rPr>
-              <a:t>3</a:t>
-            </a:r>
-            <a:endParaRPr lang="en-US" sz="2000" dirty="0"/>
-          </a:p>
-        </p:txBody>
-      </p:sp>
-      <p:sp>
-        <p:nvSpPr>
-          <p:cNvPr id="13" name="Text 11"/>
-          <p:cNvSpPr/>
-          <p:nvPr/>
-        </p:nvSpPr>
-        <p:spPr>
-          <a:xfrm>
-            <a:off x="1600200" y="3886200"/>
-            <a:ext cx="4572000" cy="384048"/>
-          </a:xfrm>
-          <a:prstGeom prst="rect">
-            <a:avLst/>
-          </a:prstGeom>
-          <a:noFill/>
-          <a:ln/>
-        </p:spPr>
-        <p:txBody>
-          <a:bodyPr wrap="square" lIns="0" tIns="0" rIns="0" bIns="0" rtlCol="0" anchor="ctr"/>
-          <a:lstStyle/>
-          <a:p>
-            <a:pPr marL="0" indent="0">
-              <a:buNone/>
-            </a:pPr>
-            <a:r>
-              <a:rPr lang="en-US" sz="1900" b="1" dirty="0">
-                <a:solidFill>
-                  <a:srgbClr val="1E2761"/>
-                </a:solidFill>
-                <a:latin typeface="Cambria" pitchFamily="34" charset="0"/>
-                <a:ea typeface="Cambria" pitchFamily="34" charset="-122"/>
-                <a:cs typeface="Cambria" pitchFamily="34" charset="-120"/>
-              </a:rPr>
-              <a:t>Números aleatorios comunes</a:t>
-            </a:r>
-            <a:endParaRPr lang="en-US" sz="1900" dirty="0"/>
-          </a:p>
-        </p:txBody>
-      </p:sp>
-      <p:sp>
-        <p:nvSpPr>
-          <p:cNvPr id="14" name="Text 12"/>
-          <p:cNvSpPr/>
-          <p:nvPr/>
-        </p:nvSpPr>
-        <p:spPr>
-          <a:xfrm>
-            <a:off x="1600200" y="4270248"/>
-            <a:ext cx="9601200" cy="365760"/>
-          </a:xfrm>
-          <a:prstGeom prst="rect">
-            <a:avLst/>
-          </a:prstGeom>
-          <a:noFill/>
-          <a:ln/>
-        </p:spPr>
-        <p:txBody>
-          <a:bodyPr wrap="square" lIns="0" tIns="0" rIns="0" bIns="0" rtlCol="0" anchor="ctr"/>
-          <a:lstStyle/>
-          <a:p>
-            <a:pPr marL="0" indent="0">
-              <a:buNone/>
-            </a:pPr>
-            <a:r>
-              <a:rPr lang="en-US" sz="1400" dirty="0">
-                <a:solidFill>
-                  <a:srgbClr val="5A6478"/>
-                </a:solidFill>
-                <a:latin typeface="Calibri" pitchFamily="34" charset="0"/>
-                <a:ea typeface="Calibri" pitchFamily="34" charset="-122"/>
-                <a:cs typeface="Calibri" pitchFamily="34" charset="-120"/>
-              </a:rPr>
-              <a:t>4 flujos separados: las configs se comparan sin ruido</a:t>
-            </a:r>
-            <a:endParaRPr lang="en-US" sz="1400" dirty="0"/>
-          </a:p>
-        </p:txBody>
-      </p:sp>
-      <p:sp>
-        <p:nvSpPr>
-          <p:cNvPr id="15" name="Shape 13"/>
-          <p:cNvSpPr/>
-          <p:nvPr/>
-        </p:nvSpPr>
-        <p:spPr>
-          <a:xfrm>
-            <a:off x="822960" y="5102352"/>
-            <a:ext cx="566928" cy="566928"/>
-          </a:xfrm>
-          <a:prstGeom prst="ellipse">
-            <a:avLst/>
-          </a:prstGeom>
-          <a:solidFill>
-            <a:srgbClr val="E8833A"/>
-          </a:solidFill>
-          <a:ln/>
-        </p:spPr>
-      </p:sp>
-      <p:sp>
-        <p:nvSpPr>
-          <p:cNvPr id="16" name="Text 14"/>
-          <p:cNvSpPr/>
-          <p:nvPr/>
-        </p:nvSpPr>
-        <p:spPr>
-          <a:xfrm>
-            <a:off x="822960" y="5102352"/>
-            <a:ext cx="566928" cy="566928"/>
-          </a:xfrm>
-          <a:prstGeom prst="rect">
-            <a:avLst/>
-          </a:prstGeom>
-          <a:noFill/>
-          <a:ln/>
-        </p:spPr>
-        <p:txBody>
-          <a:bodyPr wrap="square" rtlCol="0" anchor="ctr"/>
-          <a:lstStyle/>
-          <a:p>
-            <a:pPr marL="0" indent="0" algn="ctr">
-              <a:buNone/>
-            </a:pPr>
-            <a:r>
-              <a:rPr lang="en-US" sz="2000" b="1" dirty="0">
-                <a:solidFill>
-                  <a:srgbClr val="FFFFFF"/>
-                </a:solidFill>
-                <a:latin typeface="Cambria" pitchFamily="34" charset="0"/>
-                <a:ea typeface="Cambria" pitchFamily="34" charset="-122"/>
-                <a:cs typeface="Cambria" pitchFamily="34" charset="-120"/>
-              </a:rPr>
-              <a:t>4</a:t>
-            </a:r>
-            <a:endParaRPr lang="en-US" sz="2000" dirty="0"/>
-          </a:p>
-        </p:txBody>
-      </p:sp>
-      <p:sp>
-        <p:nvSpPr>
-          <p:cNvPr id="17" name="Text 15"/>
-          <p:cNvSpPr/>
-          <p:nvPr/>
-        </p:nvSpPr>
-        <p:spPr>
-          <a:xfrm>
-            <a:off x="1600200" y="5029200"/>
-            <a:ext cx="4572000" cy="384048"/>
-          </a:xfrm>
-          <a:prstGeom prst="rect">
-            <a:avLst/>
-          </a:prstGeom>
-          <a:noFill/>
-          <a:ln/>
-        </p:spPr>
-        <p:txBody>
-          <a:bodyPr wrap="square" lIns="0" tIns="0" rIns="0" bIns="0" rtlCol="0" anchor="ctr"/>
-          <a:lstStyle/>
-          <a:p>
-            <a:pPr marL="0" indent="0">
-              <a:buNone/>
-            </a:pPr>
-            <a:r>
-              <a:rPr lang="en-US" sz="1900" b="1" dirty="0">
-                <a:solidFill>
-                  <a:srgbClr val="1E2761"/>
-                </a:solidFill>
-                <a:latin typeface="Cambria" pitchFamily="34" charset="0"/>
-                <a:ea typeface="Cambria" pitchFamily="34" charset="-122"/>
-                <a:cs typeface="Cambria" pitchFamily="34" charset="-120"/>
-              </a:rPr>
-              <a:t>Barrido de 90 configuraciones</a:t>
-            </a:r>
-            <a:endParaRPr lang="en-US" sz="1900" dirty="0"/>
-          </a:p>
-        </p:txBody>
-      </p:sp>
-      <p:sp>
-        <p:nvSpPr>
-          <p:cNvPr id="18" name="Text 16"/>
-          <p:cNvSpPr/>
-          <p:nvPr/>
-        </p:nvSpPr>
-        <p:spPr>
-          <a:xfrm>
-            <a:off x="1600200" y="5413248"/>
-            <a:ext cx="9601200" cy="365760"/>
-          </a:xfrm>
-          <a:prstGeom prst="rect">
-            <a:avLst/>
-          </a:prstGeom>
-          <a:noFill/>
-          <a:ln/>
-        </p:spPr>
-        <p:txBody>
-          <a:bodyPr wrap="square" lIns="0" tIns="0" rIns="0" bIns="0" rtlCol="0" anchor="ctr"/>
-          <a:lstStyle/>
-          <a:p>
-            <a:pPr marL="0" indent="0">
-              <a:buNone/>
-            </a:pPr>
-            <a:r>
-              <a:rPr lang="en-US" sz="1400" dirty="0">
-                <a:solidFill>
-                  <a:srgbClr val="5A6478"/>
-                </a:solidFill>
-                <a:latin typeface="Calibri" pitchFamily="34" charset="0"/>
-                <a:ea typeface="Calibri" pitchFamily="34" charset="-122"/>
-                <a:cs typeface="Calibri" pitchFamily="34" charset="-120"/>
-              </a:rPr>
-              <a:t>Se busca la de mínimo costo por paquete entregado</a:t>
-            </a:r>
-            <a:endParaRPr lang="en-US" sz="1400" dirty="0"/>
-          </a:p>
-        </p:txBody>
-      </p:sp>
-      <p:sp>
-        <p:nvSpPr>
-          <p:cNvPr id="19" name="Text 17"/>
-          <p:cNvSpPr/>
-          <p:nvPr/>
-        </p:nvSpPr>
-        <p:spPr>
-          <a:xfrm>
-            <a:off x="822960" y="6035040"/>
-            <a:ext cx="10515600" cy="365760"/>
-          </a:xfrm>
-          <a:prstGeom prst="rect">
-            <a:avLst/>
-          </a:prstGeom>
-          <a:noFill/>
-          <a:ln/>
-        </p:spPr>
-        <p:txBody>
-          <a:bodyPr wrap="square" rtlCol="0" anchor="ctr"/>
-          <a:lstStyle/>
-          <a:p>
-            <a:pPr marL="0" indent="0">
-              <a:buNone/>
-            </a:pPr>
-            <a:r>
-              <a:rPr lang="en-US" sz="1400" i="1" dirty="0">
-                <a:solidFill>
-                  <a:srgbClr val="5A6478"/>
-                </a:solidFill>
-                <a:latin typeface="Calibri" pitchFamily="34" charset="0"/>
-                <a:ea typeface="Calibri" pitchFamily="34" charset="-122"/>
-                <a:cs typeface="Calibri" pitchFamily="34" charset="-120"/>
-              </a:rPr>
-              <a:t>Horizonte: 1 año simulado por réplica</a:t>
-            </a:r>
-            <a:endParaRPr lang="en-US" sz="1400" dirty="0"/>
+              <a:t>Estacionalidad real: Cyber 3,62 min · Normal 4,27 min · Navidad 5,20 min entre fallos</a:t>
+            </a:r>
+            <a:endParaRPr lang="en-US" sz="1450" dirty="0"/>
           </a:p>
         </p:txBody>
       </p:sp>
@@ -3389,9 +4303,8 @@
     <p:bg>
       <p:bgPr>
         <a:solidFill>
-          <a:srgbClr val="F4F6FA"/>
+          <a:srgbClr val="FFFFFF"/>
         </a:solidFill>
-        <a:effectLst/>
       </p:bgPr>
     </p:bg>
     <p:spTree>
@@ -3429,7 +4342,7 @@
           <a:bodyPr wrap="square" rtlCol="0" anchor="ctr"/>
           <a:lstStyle/>
           <a:p>
-            <a:pPr marL="0" indent="0">
+            <a:pPr indent="0" marL="0">
               <a:buNone/>
             </a:pPr>
             <a:r>
@@ -3441,6 +4354,664 @@
                 <a:ea typeface="Cambria" pitchFamily="34" charset="-122"/>
                 <a:cs typeface="Cambria" pitchFamily="34" charset="-120"/>
               </a:rPr>
+              <a:t>Cómo lo resolvimos</a:t>
+            </a:r>
+            <a:endParaRPr lang="en-US" sz="3200" dirty="0"/>
+          </a:p>
+        </p:txBody>
+      </p:sp>
+      <p:sp>
+        <p:nvSpPr>
+          <p:cNvPr id="3" name="Shape 1"/>
+          <p:cNvSpPr/>
+          <p:nvPr/>
+        </p:nvSpPr>
+        <p:spPr>
+          <a:xfrm>
+            <a:off x="822960" y="1673352"/>
+            <a:ext cx="566928" cy="566928"/>
+          </a:xfrm>
+          <a:prstGeom prst="ellipse">
+            <a:avLst/>
+          </a:prstGeom>
+          <a:solidFill>
+            <a:srgbClr val="E8833A"/>
+          </a:solidFill>
+          <a:ln/>
+        </p:spPr>
+      </p:sp>
+      <p:sp>
+        <p:nvSpPr>
+          <p:cNvPr id="4" name="Text 2"/>
+          <p:cNvSpPr/>
+          <p:nvPr/>
+        </p:nvSpPr>
+        <p:spPr>
+          <a:xfrm>
+            <a:off x="822960" y="1673352"/>
+            <a:ext cx="566928" cy="566928"/>
+          </a:xfrm>
+          <a:prstGeom prst="rect">
+            <a:avLst/>
+          </a:prstGeom>
+          <a:noFill/>
+          <a:ln/>
+        </p:spPr>
+        <p:txBody>
+          <a:bodyPr wrap="square" rtlCol="0" anchor="ctr"/>
+          <a:lstStyle/>
+          <a:p>
+            <a:pPr algn="ctr" indent="0" marL="0">
+              <a:buNone/>
+            </a:pPr>
+            <a:r>
+              <a:rPr lang="en-US" sz="2000" b="1" dirty="0">
+                <a:solidFill>
+                  <a:srgbClr val="FFFFFF"/>
+                </a:solidFill>
+                <a:latin typeface="Cambria" pitchFamily="34" charset="0"/>
+                <a:ea typeface="Cambria" pitchFamily="34" charset="-122"/>
+                <a:cs typeface="Cambria" pitchFamily="34" charset="-120"/>
+              </a:rPr>
+              <a:t>1</a:t>
+            </a:r>
+            <a:endParaRPr lang="en-US" sz="2000" dirty="0"/>
+          </a:p>
+        </p:txBody>
+      </p:sp>
+      <p:sp>
+        <p:nvSpPr>
+          <p:cNvPr id="5" name="Text 3"/>
+          <p:cNvSpPr/>
+          <p:nvPr/>
+        </p:nvSpPr>
+        <p:spPr>
+          <a:xfrm>
+            <a:off x="1600200" y="1600200"/>
+            <a:ext cx="4572000" cy="384048"/>
+          </a:xfrm>
+          <a:prstGeom prst="rect">
+            <a:avLst/>
+          </a:prstGeom>
+          <a:noFill/>
+          <a:ln/>
+        </p:spPr>
+        <p:txBody>
+          <a:bodyPr wrap="square" lIns="0" tIns="0" rIns="0" bIns="0" rtlCol="0" anchor="ctr"/>
+          <a:lstStyle/>
+          <a:p>
+            <a:pPr indent="0" marL="0">
+              <a:buNone/>
+            </a:pPr>
+            <a:r>
+              <a:rPr lang="en-US" sz="1900" b="1" dirty="0">
+                <a:solidFill>
+                  <a:srgbClr val="1E2761"/>
+                </a:solidFill>
+                <a:latin typeface="Cambria" pitchFamily="34" charset="0"/>
+                <a:ea typeface="Cambria" pitchFamily="34" charset="-122"/>
+                <a:cs typeface="Cambria" pitchFamily="34" charset="-120"/>
+              </a:rPr>
+              <a:t>Motor evento a evento</a:t>
+            </a:r>
+            <a:endParaRPr lang="en-US" sz="1900" dirty="0"/>
+          </a:p>
+        </p:txBody>
+      </p:sp>
+      <p:sp>
+        <p:nvSpPr>
+          <p:cNvPr id="6" name="Text 4"/>
+          <p:cNvSpPr/>
+          <p:nvPr/>
+        </p:nvSpPr>
+        <p:spPr>
+          <a:xfrm>
+            <a:off x="1600200" y="1984248"/>
+            <a:ext cx="9601200" cy="365760"/>
+          </a:xfrm>
+          <a:prstGeom prst="rect">
+            <a:avLst/>
+          </a:prstGeom>
+          <a:noFill/>
+          <a:ln/>
+        </p:spPr>
+        <p:txBody>
+          <a:bodyPr wrap="square" lIns="0" tIns="0" rIns="0" bIns="0" rtlCol="0" anchor="ctr"/>
+          <a:lstStyle/>
+          <a:p>
+            <a:pPr indent="0" marL="0">
+              <a:buNone/>
+            </a:pPr>
+            <a:r>
+              <a:rPr lang="en-US" sz="1400" dirty="0">
+                <a:solidFill>
+                  <a:srgbClr val="5A6478"/>
+                </a:solidFill>
+                <a:latin typeface="Calibri" pitchFamily="34" charset="0"/>
+                <a:ea typeface="Calibri" pitchFamily="34" charset="-122"/>
+                <a:cs typeface="Calibri" pitchFamily="34" charset="-120"/>
+              </a:rPr>
+              <a:t>Implementado a medida, sin librerías de simulación</a:t>
+            </a:r>
+            <a:endParaRPr lang="en-US" sz="1400" dirty="0"/>
+          </a:p>
+        </p:txBody>
+      </p:sp>
+      <p:sp>
+        <p:nvSpPr>
+          <p:cNvPr id="7" name="Shape 5"/>
+          <p:cNvSpPr/>
+          <p:nvPr/>
+        </p:nvSpPr>
+        <p:spPr>
+          <a:xfrm>
+            <a:off x="822960" y="2816352"/>
+            <a:ext cx="566928" cy="566928"/>
+          </a:xfrm>
+          <a:prstGeom prst="ellipse">
+            <a:avLst/>
+          </a:prstGeom>
+          <a:solidFill>
+            <a:srgbClr val="E8833A"/>
+          </a:solidFill>
+          <a:ln/>
+        </p:spPr>
+      </p:sp>
+      <p:sp>
+        <p:nvSpPr>
+          <p:cNvPr id="8" name="Text 6"/>
+          <p:cNvSpPr/>
+          <p:nvPr/>
+        </p:nvSpPr>
+        <p:spPr>
+          <a:xfrm>
+            <a:off x="822960" y="2816352"/>
+            <a:ext cx="566928" cy="566928"/>
+          </a:xfrm>
+          <a:prstGeom prst="rect">
+            <a:avLst/>
+          </a:prstGeom>
+          <a:noFill/>
+          <a:ln/>
+        </p:spPr>
+        <p:txBody>
+          <a:bodyPr wrap="square" rtlCol="0" anchor="ctr"/>
+          <a:lstStyle/>
+          <a:p>
+            <a:pPr algn="ctr" indent="0" marL="0">
+              <a:buNone/>
+            </a:pPr>
+            <a:r>
+              <a:rPr lang="en-US" sz="2000" b="1" dirty="0">
+                <a:solidFill>
+                  <a:srgbClr val="FFFFFF"/>
+                </a:solidFill>
+                <a:latin typeface="Cambria" pitchFamily="34" charset="0"/>
+                <a:ea typeface="Cambria" pitchFamily="34" charset="-122"/>
+                <a:cs typeface="Cambria" pitchFamily="34" charset="-120"/>
+              </a:rPr>
+              <a:t>2</a:t>
+            </a:r>
+            <a:endParaRPr lang="en-US" sz="2000" dirty="0"/>
+          </a:p>
+        </p:txBody>
+      </p:sp>
+      <p:sp>
+        <p:nvSpPr>
+          <p:cNvPr id="9" name="Text 7"/>
+          <p:cNvSpPr/>
+          <p:nvPr/>
+        </p:nvSpPr>
+        <p:spPr>
+          <a:xfrm>
+            <a:off x="1600200" y="2743200"/>
+            <a:ext cx="4572000" cy="384048"/>
+          </a:xfrm>
+          <a:prstGeom prst="rect">
+            <a:avLst/>
+          </a:prstGeom>
+          <a:noFill/>
+          <a:ln/>
+        </p:spPr>
+        <p:txBody>
+          <a:bodyPr wrap="square" lIns="0" tIns="0" rIns="0" bIns="0" rtlCol="0" anchor="ctr"/>
+          <a:lstStyle/>
+          <a:p>
+            <a:pPr indent="0" marL="0">
+              <a:buNone/>
+            </a:pPr>
+            <a:r>
+              <a:rPr lang="en-US" sz="1900" b="1" dirty="0">
+                <a:solidFill>
+                  <a:srgbClr val="1E2761"/>
+                </a:solidFill>
+                <a:latin typeface="Cambria" pitchFamily="34" charset="0"/>
+                <a:ea typeface="Cambria" pitchFamily="34" charset="-122"/>
+                <a:cs typeface="Cambria" pitchFamily="34" charset="-120"/>
+              </a:rPr>
+              <a:t>30 réplicas + IC 95 %</a:t>
+            </a:r>
+            <a:endParaRPr lang="en-US" sz="1900" dirty="0"/>
+          </a:p>
+        </p:txBody>
+      </p:sp>
+      <p:sp>
+        <p:nvSpPr>
+          <p:cNvPr id="10" name="Text 8"/>
+          <p:cNvSpPr/>
+          <p:nvPr/>
+        </p:nvSpPr>
+        <p:spPr>
+          <a:xfrm>
+            <a:off x="1600200" y="3127248"/>
+            <a:ext cx="9601200" cy="365760"/>
+          </a:xfrm>
+          <a:prstGeom prst="rect">
+            <a:avLst/>
+          </a:prstGeom>
+          <a:noFill/>
+          <a:ln/>
+        </p:spPr>
+        <p:txBody>
+          <a:bodyPr wrap="square" lIns="0" tIns="0" rIns="0" bIns="0" rtlCol="0" anchor="ctr"/>
+          <a:lstStyle/>
+          <a:p>
+            <a:pPr indent="0" marL="0">
+              <a:buNone/>
+            </a:pPr>
+            <a:r>
+              <a:rPr lang="en-US" sz="1400" dirty="0">
+                <a:solidFill>
+                  <a:srgbClr val="5A6478"/>
+                </a:solidFill>
+                <a:latin typeface="Calibri" pitchFamily="34" charset="0"/>
+                <a:ea typeface="Calibri" pitchFamily="34" charset="-122"/>
+                <a:cs typeface="Calibri" pitchFamily="34" charset="-120"/>
+              </a:rPr>
+              <a:t>Cada configuración se informa con su intervalo de confianza</a:t>
+            </a:r>
+            <a:endParaRPr lang="en-US" sz="1400" dirty="0"/>
+          </a:p>
+        </p:txBody>
+      </p:sp>
+      <p:sp>
+        <p:nvSpPr>
+          <p:cNvPr id="11" name="Shape 9"/>
+          <p:cNvSpPr/>
+          <p:nvPr/>
+        </p:nvSpPr>
+        <p:spPr>
+          <a:xfrm>
+            <a:off x="822960" y="3959352"/>
+            <a:ext cx="566928" cy="566928"/>
+          </a:xfrm>
+          <a:prstGeom prst="ellipse">
+            <a:avLst/>
+          </a:prstGeom>
+          <a:solidFill>
+            <a:srgbClr val="E8833A"/>
+          </a:solidFill>
+          <a:ln/>
+        </p:spPr>
+      </p:sp>
+      <p:sp>
+        <p:nvSpPr>
+          <p:cNvPr id="12" name="Text 10"/>
+          <p:cNvSpPr/>
+          <p:nvPr/>
+        </p:nvSpPr>
+        <p:spPr>
+          <a:xfrm>
+            <a:off x="822960" y="3959352"/>
+            <a:ext cx="566928" cy="566928"/>
+          </a:xfrm>
+          <a:prstGeom prst="rect">
+            <a:avLst/>
+          </a:prstGeom>
+          <a:noFill/>
+          <a:ln/>
+        </p:spPr>
+        <p:txBody>
+          <a:bodyPr wrap="square" rtlCol="0" anchor="ctr"/>
+          <a:lstStyle/>
+          <a:p>
+            <a:pPr algn="ctr" indent="0" marL="0">
+              <a:buNone/>
+            </a:pPr>
+            <a:r>
+              <a:rPr lang="en-US" sz="2000" b="1" dirty="0">
+                <a:solidFill>
+                  <a:srgbClr val="FFFFFF"/>
+                </a:solidFill>
+                <a:latin typeface="Cambria" pitchFamily="34" charset="0"/>
+                <a:ea typeface="Cambria" pitchFamily="34" charset="-122"/>
+                <a:cs typeface="Cambria" pitchFamily="34" charset="-120"/>
+              </a:rPr>
+              <a:t>3</a:t>
+            </a:r>
+            <a:endParaRPr lang="en-US" sz="2000" dirty="0"/>
+          </a:p>
+        </p:txBody>
+      </p:sp>
+      <p:sp>
+        <p:nvSpPr>
+          <p:cNvPr id="13" name="Text 11"/>
+          <p:cNvSpPr/>
+          <p:nvPr/>
+        </p:nvSpPr>
+        <p:spPr>
+          <a:xfrm>
+            <a:off x="1600200" y="3886200"/>
+            <a:ext cx="4572000" cy="384048"/>
+          </a:xfrm>
+          <a:prstGeom prst="rect">
+            <a:avLst/>
+          </a:prstGeom>
+          <a:noFill/>
+          <a:ln/>
+        </p:spPr>
+        <p:txBody>
+          <a:bodyPr wrap="square" lIns="0" tIns="0" rIns="0" bIns="0" rtlCol="0" anchor="ctr"/>
+          <a:lstStyle/>
+          <a:p>
+            <a:pPr indent="0" marL="0">
+              <a:buNone/>
+            </a:pPr>
+            <a:r>
+              <a:rPr lang="en-US" sz="1900" b="1" dirty="0">
+                <a:solidFill>
+                  <a:srgbClr val="1E2761"/>
+                </a:solidFill>
+                <a:latin typeface="Cambria" pitchFamily="34" charset="0"/>
+                <a:ea typeface="Cambria" pitchFamily="34" charset="-122"/>
+                <a:cs typeface="Cambria" pitchFamily="34" charset="-120"/>
+              </a:rPr>
+              <a:t>Números aleatorios comunes</a:t>
+            </a:r>
+            <a:endParaRPr lang="en-US" sz="1900" dirty="0"/>
+          </a:p>
+        </p:txBody>
+      </p:sp>
+      <p:sp>
+        <p:nvSpPr>
+          <p:cNvPr id="14" name="Text 12"/>
+          <p:cNvSpPr/>
+          <p:nvPr/>
+        </p:nvSpPr>
+        <p:spPr>
+          <a:xfrm>
+            <a:off x="1600200" y="4270248"/>
+            <a:ext cx="9601200" cy="365760"/>
+          </a:xfrm>
+          <a:prstGeom prst="rect">
+            <a:avLst/>
+          </a:prstGeom>
+          <a:noFill/>
+          <a:ln/>
+        </p:spPr>
+        <p:txBody>
+          <a:bodyPr wrap="square" lIns="0" tIns="0" rIns="0" bIns="0" rtlCol="0" anchor="ctr"/>
+          <a:lstStyle/>
+          <a:p>
+            <a:pPr indent="0" marL="0">
+              <a:buNone/>
+            </a:pPr>
+            <a:r>
+              <a:rPr lang="en-US" sz="1400" dirty="0">
+                <a:solidFill>
+                  <a:srgbClr val="5A6478"/>
+                </a:solidFill>
+                <a:latin typeface="Calibri" pitchFamily="34" charset="0"/>
+                <a:ea typeface="Calibri" pitchFamily="34" charset="-122"/>
+                <a:cs typeface="Calibri" pitchFamily="34" charset="-120"/>
+              </a:rPr>
+              <a:t>4 flujos separados: las configs se comparan sin ruido</a:t>
+            </a:r>
+            <a:endParaRPr lang="en-US" sz="1400" dirty="0"/>
+          </a:p>
+        </p:txBody>
+      </p:sp>
+      <p:sp>
+        <p:nvSpPr>
+          <p:cNvPr id="15" name="Shape 13"/>
+          <p:cNvSpPr/>
+          <p:nvPr/>
+        </p:nvSpPr>
+        <p:spPr>
+          <a:xfrm>
+            <a:off x="822960" y="5102352"/>
+            <a:ext cx="566928" cy="566928"/>
+          </a:xfrm>
+          <a:prstGeom prst="ellipse">
+            <a:avLst/>
+          </a:prstGeom>
+          <a:solidFill>
+            <a:srgbClr val="E8833A"/>
+          </a:solidFill>
+          <a:ln/>
+        </p:spPr>
+      </p:sp>
+      <p:sp>
+        <p:nvSpPr>
+          <p:cNvPr id="16" name="Text 14"/>
+          <p:cNvSpPr/>
+          <p:nvPr/>
+        </p:nvSpPr>
+        <p:spPr>
+          <a:xfrm>
+            <a:off x="822960" y="5102352"/>
+            <a:ext cx="566928" cy="566928"/>
+          </a:xfrm>
+          <a:prstGeom prst="rect">
+            <a:avLst/>
+          </a:prstGeom>
+          <a:noFill/>
+          <a:ln/>
+        </p:spPr>
+        <p:txBody>
+          <a:bodyPr wrap="square" rtlCol="0" anchor="ctr"/>
+          <a:lstStyle/>
+          <a:p>
+            <a:pPr algn="ctr" indent="0" marL="0">
+              <a:buNone/>
+            </a:pPr>
+            <a:r>
+              <a:rPr lang="en-US" sz="2000" b="1" dirty="0">
+                <a:solidFill>
+                  <a:srgbClr val="FFFFFF"/>
+                </a:solidFill>
+                <a:latin typeface="Cambria" pitchFamily="34" charset="0"/>
+                <a:ea typeface="Cambria" pitchFamily="34" charset="-122"/>
+                <a:cs typeface="Cambria" pitchFamily="34" charset="-120"/>
+              </a:rPr>
+              <a:t>4</a:t>
+            </a:r>
+            <a:endParaRPr lang="en-US" sz="2000" dirty="0"/>
+          </a:p>
+        </p:txBody>
+      </p:sp>
+      <p:sp>
+        <p:nvSpPr>
+          <p:cNvPr id="17" name="Text 15"/>
+          <p:cNvSpPr/>
+          <p:nvPr/>
+        </p:nvSpPr>
+        <p:spPr>
+          <a:xfrm>
+            <a:off x="1600200" y="5029200"/>
+            <a:ext cx="4572000" cy="384048"/>
+          </a:xfrm>
+          <a:prstGeom prst="rect">
+            <a:avLst/>
+          </a:prstGeom>
+          <a:noFill/>
+          <a:ln/>
+        </p:spPr>
+        <p:txBody>
+          <a:bodyPr wrap="square" lIns="0" tIns="0" rIns="0" bIns="0" rtlCol="0" anchor="ctr"/>
+          <a:lstStyle/>
+          <a:p>
+            <a:pPr indent="0" marL="0">
+              <a:buNone/>
+            </a:pPr>
+            <a:r>
+              <a:rPr lang="en-US" sz="1900" b="1" dirty="0">
+                <a:solidFill>
+                  <a:srgbClr val="1E2761"/>
+                </a:solidFill>
+                <a:latin typeface="Cambria" pitchFamily="34" charset="0"/>
+                <a:ea typeface="Cambria" pitchFamily="34" charset="-122"/>
+                <a:cs typeface="Cambria" pitchFamily="34" charset="-120"/>
+              </a:rPr>
+              <a:t>Barrido de 90 configuraciones</a:t>
+            </a:r>
+            <a:endParaRPr lang="en-US" sz="1900" dirty="0"/>
+          </a:p>
+        </p:txBody>
+      </p:sp>
+      <p:sp>
+        <p:nvSpPr>
+          <p:cNvPr id="18" name="Text 16"/>
+          <p:cNvSpPr/>
+          <p:nvPr/>
+        </p:nvSpPr>
+        <p:spPr>
+          <a:xfrm>
+            <a:off x="1600200" y="5413248"/>
+            <a:ext cx="9601200" cy="365760"/>
+          </a:xfrm>
+          <a:prstGeom prst="rect">
+            <a:avLst/>
+          </a:prstGeom>
+          <a:noFill/>
+          <a:ln/>
+        </p:spPr>
+        <p:txBody>
+          <a:bodyPr wrap="square" lIns="0" tIns="0" rIns="0" bIns="0" rtlCol="0" anchor="ctr"/>
+          <a:lstStyle/>
+          <a:p>
+            <a:pPr indent="0" marL="0">
+              <a:buNone/>
+            </a:pPr>
+            <a:r>
+              <a:rPr lang="en-US" sz="1400" dirty="0">
+                <a:solidFill>
+                  <a:srgbClr val="5A6478"/>
+                </a:solidFill>
+                <a:latin typeface="Calibri" pitchFamily="34" charset="0"/>
+                <a:ea typeface="Calibri" pitchFamily="34" charset="-122"/>
+                <a:cs typeface="Calibri" pitchFamily="34" charset="-120"/>
+              </a:rPr>
+              <a:t>Se busca la de mínimo costo por paquete entregado</a:t>
+            </a:r>
+            <a:endParaRPr lang="en-US" sz="1400" dirty="0"/>
+          </a:p>
+        </p:txBody>
+      </p:sp>
+      <p:sp>
+        <p:nvSpPr>
+          <p:cNvPr id="19" name="Text 17"/>
+          <p:cNvSpPr/>
+          <p:nvPr/>
+        </p:nvSpPr>
+        <p:spPr>
+          <a:xfrm>
+            <a:off x="822960" y="6035040"/>
+            <a:ext cx="10515600" cy="365760"/>
+          </a:xfrm>
+          <a:prstGeom prst="rect">
+            <a:avLst/>
+          </a:prstGeom>
+          <a:noFill/>
+          <a:ln/>
+        </p:spPr>
+        <p:txBody>
+          <a:bodyPr wrap="square" rtlCol="0" anchor="ctr"/>
+          <a:lstStyle/>
+          <a:p>
+            <a:pPr indent="0" marL="0">
+              <a:buNone/>
+            </a:pPr>
+            <a:r>
+              <a:rPr lang="en-US" sz="1400" i="1" dirty="0">
+                <a:solidFill>
+                  <a:srgbClr val="5A6478"/>
+                </a:solidFill>
+                <a:latin typeface="Calibri" pitchFamily="34" charset="0"/>
+                <a:ea typeface="Calibri" pitchFamily="34" charset="-122"/>
+                <a:cs typeface="Calibri" pitchFamily="34" charset="-120"/>
+              </a:rPr>
+              <a:t>Horizonte: 1 año simulado por réplica</a:t>
+            </a:r>
+            <a:endParaRPr lang="en-US" sz="1400" dirty="0"/>
+          </a:p>
+        </p:txBody>
+      </p:sp>
+    </p:spTree>
+  </p:cSld>
+  <p:clrMapOvr>
+    <a:masterClrMapping/>
+  </p:clrMapOvr>
+</p:sld>
+</file>
+
+<file path=ppt/slides/slide7.xml><?xml version="1.0" encoding="utf-8"?>
+<p:sld xmlns:a="http://schemas.openxmlformats.org/drawingml/2006/main" xmlns:r="http://schemas.openxmlformats.org/officeDocument/2006/relationships" xmlns:p="http://schemas.openxmlformats.org/presentationml/2006/main">
+  <p:cSld name="Slide 7">
+    <p:bg>
+      <p:bgPr>
+        <a:solidFill>
+          <a:srgbClr val="F4F6FA"/>
+        </a:solidFill>
+      </p:bgPr>
+    </p:bg>
+    <p:spTree>
+      <p:nvGrpSpPr>
+        <p:cNvPr id="1" name=""/>
+        <p:cNvGrpSpPr/>
+        <p:nvPr/>
+      </p:nvGrpSpPr>
+      <p:grpSpPr>
+        <a:xfrm>
+          <a:off x="0" y="0"/>
+          <a:ext cx="0" cy="0"/>
+          <a:chOff x="0" y="0"/>
+          <a:chExt cx="0" cy="0"/>
+        </a:xfrm>
+      </p:grpSpPr>
+      <p:sp>
+        <p:nvSpPr>
+          <p:cNvPr id="2" name="Text 0"/>
+          <p:cNvSpPr/>
+          <p:nvPr/>
+        </p:nvSpPr>
+        <p:spPr>
+          <a:xfrm>
+            <a:off x="548640" y="384048"/>
+            <a:ext cx="11064240" cy="731520"/>
+          </a:xfrm>
+          <a:prstGeom prst="rect">
+            <a:avLst/>
+          </a:prstGeom>
+          <a:noFill/>
+          <a:ln/>
+        </p:spPr>
+        <p:txBody>
+          <a:bodyPr wrap="square" rtlCol="0" anchor="ctr"/>
+          <a:lstStyle/>
+          <a:p>
+            <a:pPr indent="0" marL="0">
+              <a:buNone/>
+            </a:pPr>
+            <a:r>
+              <a:rPr lang="en-US" sz="3200" b="1" dirty="0">
+                <a:solidFill>
+                  <a:srgbClr val="1E2761"/>
+                </a:solidFill>
+                <a:latin typeface="Cambria" pitchFamily="34" charset="0"/>
+                <a:ea typeface="Cambria" pitchFamily="34" charset="-122"/>
+                <a:cs typeface="Cambria" pitchFamily="34" charset="-120"/>
+              </a:rPr>
               <a:t>Resultado: existe un óptimo</a:t>
             </a:r>
             <a:endParaRPr lang="en-US" sz="3200" dirty="0"/>
@@ -3449,14 +5020,14 @@
       </p:sp>
       <p:pic>
         <p:nvPicPr>
-          <p:cNvPr id="3" name="Image 0" descr="slide_curvaU.png"/>
+          <p:cNvPr id="3" name="Image 0" descr="slide_curvaU.png">    </p:cNvPr>
           <p:cNvPicPr>
             <a:picLocks noChangeAspect="1"/>
           </p:cNvPicPr>
           <p:nvPr/>
         </p:nvPicPr>
         <p:blipFill>
-          <a:blip r:embed="rId3"/>
+          <a:blip r:embed="rId1"/>
           <a:stretch>
             <a:fillRect/>
           </a:stretch>
@@ -3492,7 +5063,7 @@
           <a:bodyPr wrap="square" rtlCol="0" anchor="ctr"/>
           <a:lstStyle/>
           <a:p>
-            <a:pPr marL="0" indent="0">
+            <a:pPr indent="0" marL="0">
               <a:buNone/>
             </a:pPr>
             <a:r>
@@ -3512,7 +5083,7 @@
       </p:sp>
       <p:graphicFrame>
         <p:nvGraphicFramePr>
-          <p:cNvPr id="7" name="Table 0"/>
+          <p:cNvPr id="8" name="Table 0"/>
           <p:cNvGraphicFramePr>
             <a:graphicFrameLocks noGrp="1"/>
           </p:cNvGraphicFramePr>
@@ -3526,34 +5097,16 @@
         </p:nvGraphicFramePr>
         <p:xfrm>
           <a:off x="7680960" y="2057400"/>
-          <a:ext cx="3931920" cy="1536192"/>
+          <a:ext cx="3931920" cy="914400"/>
         </p:xfrm>
         <a:graphic>
           <a:graphicData uri="http://schemas.openxmlformats.org/drawingml/2006/table">
             <a:tbl>
               <a:tblPr/>
               <a:tblGrid>
-                <a:gridCol w="1371600">
-                  <a:extLst>
-                    <a:ext uri="{9D8B030D-6E8A-4147-A177-3AD203B41FA5}">
-                      <a16:colId xmlns:a16="http://schemas.microsoft.com/office/drawing/2014/main" val="20000"/>
-                    </a:ext>
-                  </a:extLst>
-                </a:gridCol>
-                <a:gridCol w="1463040">
-                  <a:extLst>
-                    <a:ext uri="{9D8B030D-6E8A-4147-A177-3AD203B41FA5}">
-                      <a16:colId xmlns:a16="http://schemas.microsoft.com/office/drawing/2014/main" val="20001"/>
-                    </a:ext>
-                  </a:extLst>
-                </a:gridCol>
-                <a:gridCol w="1097280">
-                  <a:extLst>
-                    <a:ext uri="{9D8B030D-6E8A-4147-A177-3AD203B41FA5}">
-                      <a16:colId xmlns:a16="http://schemas.microsoft.com/office/drawing/2014/main" val="20002"/>
-                    </a:ext>
-                  </a:extLst>
-                </a:gridCol>
+                <a:gridCol w="1371600"/>
+                <a:gridCol w="1463040"/>
+                <a:gridCol w="1097280"/>
               </a:tblGrid>
               <a:tr h="384048">
                 <a:tc>
@@ -3561,7 +5114,7 @@
                     <a:bodyPr/>
                     <a:lstStyle/>
                     <a:p>
-                      <a:pPr marL="0" indent="0">
+                      <a:pPr indent="0" marL="0">
                         <a:buNone/>
                       </a:pPr>
                       <a:r>
@@ -3582,7 +5135,7 @@
                       </a:endParaRPr>
                     </a:p>
                   </a:txBody>
-                  <a:tcPr anchor="ctr">
+                  <a:tcPr marL="91440" marR="91440" marT="45720" marB="45720" anchor="ctr">
                     <a:lnL w="12700" cap="flat" cmpd="sng" algn="ctr">
                       <a:solidFill>
                         <a:srgbClr val="E2E7F0"/>
@@ -3629,7 +5182,7 @@
                     <a:bodyPr/>
                     <a:lstStyle/>
                     <a:p>
-                      <a:pPr marL="0" indent="0">
+                      <a:pPr indent="0" marL="0">
                         <a:buNone/>
                       </a:pPr>
                       <a:r>
@@ -3650,7 +5203,7 @@
                       </a:endParaRPr>
                     </a:p>
                   </a:txBody>
-                  <a:tcPr anchor="ctr">
+                  <a:tcPr marL="91440" marR="91440" marT="45720" marB="45720" anchor="ctr">
                     <a:lnL w="12700" cap="flat" cmpd="sng" algn="ctr">
                       <a:solidFill>
                         <a:srgbClr val="E2E7F0"/>
@@ -3697,7 +5250,7 @@
                     <a:bodyPr/>
                     <a:lstStyle/>
                     <a:p>
-                      <a:pPr marL="0" indent="0">
+                      <a:pPr indent="0" marL="0">
                         <a:buNone/>
                       </a:pPr>
                       <a:r>
@@ -3718,7 +5271,7 @@
                       </a:endParaRPr>
                     </a:p>
                   </a:txBody>
-                  <a:tcPr anchor="ctr">
+                  <a:tcPr marL="91440" marR="91440" marT="45720" marB="45720" anchor="ctr">
                     <a:lnL w="12700" cap="flat" cmpd="sng" algn="ctr">
                       <a:solidFill>
                         <a:srgbClr val="E2E7F0"/>
@@ -3760,11 +5313,6 @@
                     </a:solidFill>
                   </a:tcPr>
                 </a:tc>
-                <a:extLst>
-                  <a:ext uri="{0D108BD9-81ED-4DB2-BD59-A6C34878D82A}">
-                    <a16:rowId xmlns:a16="http://schemas.microsoft.com/office/drawing/2014/main" val="10000"/>
-                  </a:ext>
-                </a:extLst>
               </a:tr>
               <a:tr h="384048">
                 <a:tc>
@@ -3772,7 +5320,7 @@
                     <a:bodyPr/>
                     <a:lstStyle/>
                     <a:p>
-                      <a:pPr marL="0" indent="0">
+                      <a:pPr indent="0" marL="0">
                         <a:buNone/>
                       </a:pPr>
                       <a:r>
@@ -3793,7 +5341,7 @@
                       </a:endParaRPr>
                     </a:p>
                   </a:txBody>
-                  <a:tcPr anchor="ctr">
+                  <a:tcPr marL="91440" marR="91440" marT="45720" marB="45720" anchor="ctr">
                     <a:lnL w="12700" cap="flat" cmpd="sng" algn="ctr">
                       <a:solidFill>
                         <a:srgbClr val="E2E7F0"/>
@@ -3837,7 +5385,7 @@
                     <a:bodyPr/>
                     <a:lstStyle/>
                     <a:p>
-                      <a:pPr marL="0" indent="0">
+                      <a:pPr indent="0" marL="0">
                         <a:buNone/>
                       </a:pPr>
                       <a:r>
@@ -3849,7 +5397,7 @@
                           <a:ea typeface="Calibri" pitchFamily="34" charset="-122"/>
                           <a:cs typeface="Calibri" pitchFamily="34" charset="-120"/>
                         </a:rPr>
-                        <a:t>40 / 20 / 10</a:t>
+                        <a:t>50 / 15 / 10</a:t>
                       </a:r>
                       <a:endParaRPr lang="en-US" sz="1300" dirty="0">
                         <a:latin typeface="Calibri" charset="0"/>
@@ -3858,7 +5406,7 @@
                       </a:endParaRPr>
                     </a:p>
                   </a:txBody>
-                  <a:tcPr anchor="ctr">
+                  <a:tcPr marL="91440" marR="91440" marT="45720" marB="45720" anchor="ctr">
                     <a:lnL w="12700" cap="flat" cmpd="sng" algn="ctr">
                       <a:solidFill>
                         <a:srgbClr val="E2E7F0"/>
@@ -3902,7 +5450,7 @@
                     <a:bodyPr/>
                     <a:lstStyle/>
                     <a:p>
-                      <a:pPr marL="0" indent="0">
+                      <a:pPr indent="0" marL="0">
                         <a:buNone/>
                       </a:pPr>
                       <a:r>
@@ -3923,7 +5471,7 @@
                       </a:endParaRPr>
                     </a:p>
                   </a:txBody>
-                  <a:tcPr anchor="ctr">
+                  <a:tcPr marL="91440" marR="91440" marT="45720" marB="45720" anchor="ctr">
                     <a:lnL w="12700" cap="flat" cmpd="sng" algn="ctr">
                       <a:solidFill>
                         <a:srgbClr val="E2E7F0"/>
@@ -3962,11 +5510,6 @@
                     </a:lnB>
                   </a:tcPr>
                 </a:tc>
-                <a:extLst>
-                  <a:ext uri="{0D108BD9-81ED-4DB2-BD59-A6C34878D82A}">
-                    <a16:rowId xmlns:a16="http://schemas.microsoft.com/office/drawing/2014/main" val="10001"/>
-                  </a:ext>
-                </a:extLst>
               </a:tr>
               <a:tr h="384048">
                 <a:tc>
@@ -3974,7 +5517,7 @@
                     <a:bodyPr/>
                     <a:lstStyle/>
                     <a:p>
-                      <a:pPr marL="0" indent="0">
+                      <a:pPr indent="0" marL="0">
                         <a:buNone/>
                       </a:pPr>
                       <a:r>
@@ -3995,7 +5538,7 @@
                       </a:endParaRPr>
                     </a:p>
                   </a:txBody>
-                  <a:tcPr anchor="ctr">
+                  <a:tcPr marL="91440" marR="91440" marT="45720" marB="45720" anchor="ctr">
                     <a:lnL w="12700" cap="flat" cmpd="sng" algn="ctr">
                       <a:solidFill>
                         <a:srgbClr val="E2E7F0"/>
@@ -4039,7 +5582,7 @@
                     <a:bodyPr/>
                     <a:lstStyle/>
                     <a:p>
-                      <a:pPr marL="0" indent="0">
+                      <a:pPr indent="0" marL="0">
                         <a:buNone/>
                       </a:pPr>
                       <a:r>
@@ -4060,7 +5603,7 @@
                       </a:endParaRPr>
                     </a:p>
                   </a:txBody>
-                  <a:tcPr anchor="ctr">
+                  <a:tcPr marL="91440" marR="91440" marT="45720" marB="45720" anchor="ctr">
                     <a:lnL w="12700" cap="flat" cmpd="sng" algn="ctr">
                       <a:solidFill>
                         <a:srgbClr val="E2E7F0"/>
@@ -4104,7 +5647,7 @@
                     <a:bodyPr/>
                     <a:lstStyle/>
                     <a:p>
-                      <a:pPr marL="0" indent="0">
+                      <a:pPr indent="0" marL="0">
                         <a:buNone/>
                       </a:pPr>
                       <a:r>
@@ -4125,7 +5668,7 @@
                       </a:endParaRPr>
                     </a:p>
                   </a:txBody>
-                  <a:tcPr anchor="ctr">
+                  <a:tcPr marL="91440" marR="91440" marT="45720" marB="45720" anchor="ctr">
                     <a:lnL w="12700" cap="flat" cmpd="sng" algn="ctr">
                       <a:solidFill>
                         <a:srgbClr val="E2E7F0"/>
@@ -4164,11 +5707,6 @@
                     </a:lnB>
                   </a:tcPr>
                 </a:tc>
-                <a:extLst>
-                  <a:ext uri="{0D108BD9-81ED-4DB2-BD59-A6C34878D82A}">
-                    <a16:rowId xmlns:a16="http://schemas.microsoft.com/office/drawing/2014/main" val="10002"/>
-                  </a:ext>
-                </a:extLst>
               </a:tr>
               <a:tr h="384048">
                 <a:tc>
@@ -4176,7 +5714,7 @@
                     <a:bodyPr/>
                     <a:lstStyle/>
                     <a:p>
-                      <a:pPr marL="0" indent="0">
+                      <a:pPr indent="0" marL="0">
                         <a:buNone/>
                       </a:pPr>
                       <a:r>
@@ -4197,7 +5735,7 @@
                       </a:endParaRPr>
                     </a:p>
                   </a:txBody>
-                  <a:tcPr anchor="ctr">
+                  <a:tcPr marL="91440" marR="91440" marT="45720" marB="45720" anchor="ctr">
                     <a:lnL w="12700" cap="flat" cmpd="sng" algn="ctr">
                       <a:solidFill>
                         <a:srgbClr val="E2E7F0"/>
@@ -4241,7 +5779,7 @@
                     <a:bodyPr/>
                     <a:lstStyle/>
                     <a:p>
-                      <a:pPr marL="0" indent="0">
+                      <a:pPr indent="0" marL="0">
                         <a:buNone/>
                       </a:pPr>
                       <a:r>
@@ -4262,7 +5800,7 @@
                       </a:endParaRPr>
                     </a:p>
                   </a:txBody>
-                  <a:tcPr anchor="ctr">
+                  <a:tcPr marL="91440" marR="91440" marT="45720" marB="45720" anchor="ctr">
                     <a:lnL w="12700" cap="flat" cmpd="sng" algn="ctr">
                       <a:solidFill>
                         <a:srgbClr val="E2E7F0"/>
@@ -4306,7 +5844,7 @@
                     <a:bodyPr/>
                     <a:lstStyle/>
                     <a:p>
-                      <a:pPr marL="0" indent="0">
+                      <a:pPr indent="0" marL="0">
                         <a:buNone/>
                       </a:pPr>
                       <a:r>
@@ -4327,7 +5865,7 @@
                       </a:endParaRPr>
                     </a:p>
                   </a:txBody>
-                  <a:tcPr anchor="ctr">
+                  <a:tcPr marL="91440" marR="91440" marT="45720" marB="45720" anchor="ctr">
                     <a:lnL w="12700" cap="flat" cmpd="sng" algn="ctr">
                       <a:solidFill>
                         <a:srgbClr val="E2E7F0"/>
@@ -4366,11 +5904,6 @@
                     </a:lnB>
                   </a:tcPr>
                 </a:tc>
-                <a:extLst>
-                  <a:ext uri="{0D108BD9-81ED-4DB2-BD59-A6C34878D82A}">
-                    <a16:rowId xmlns:a16="http://schemas.microsoft.com/office/drawing/2014/main" val="10003"/>
-                  </a:ext>
-                </a:extLst>
               </a:tr>
             </a:tbl>
           </a:graphicData>
@@ -4397,7 +5930,7 @@
           <a:bodyPr wrap="square" rtlCol="0" anchor="ctr"/>
           <a:lstStyle/>
           <a:p>
-            <a:pPr marL="0" indent="0">
+            <a:pPr indent="0" marL="0">
               <a:buNone/>
             </a:pPr>
             <a:r>
@@ -4423,15 +5956,14 @@
 </p:sld>
 </file>
 
-<file path=ppt/slides/slide7.xml><?xml version="1.0" encoding="utf-8"?>
+<file path=ppt/slides/slide8.xml><?xml version="1.0" encoding="utf-8"?>
 <p:sld xmlns:a="http://schemas.openxmlformats.org/drawingml/2006/main" xmlns:r="http://schemas.openxmlformats.org/officeDocument/2006/relationships" xmlns:p="http://schemas.openxmlformats.org/presentationml/2006/main">
-  <p:cSld name="Slide 7">
+  <p:cSld name="Slide 8">
     <p:bg>
       <p:bgPr>
         <a:solidFill>
           <a:srgbClr val="FFFFFF"/>
         </a:solidFill>
-        <a:effectLst/>
       </p:bgPr>
     </p:bg>
     <p:spTree>
@@ -4469,7 +6001,7 @@
           <a:bodyPr wrap="square" rtlCol="0" anchor="ctr"/>
           <a:lstStyle/>
           <a:p>
-            <a:pPr marL="0" indent="0">
+            <a:pPr indent="0" marL="0">
               <a:buNone/>
             </a:pPr>
             <a:r>
@@ -4489,14 +6021,14 @@
       </p:sp>
       <p:pic>
         <p:nvPicPr>
-          <p:cNvPr id="3" name="Image 0" descr="slide_comparacion.png"/>
+          <p:cNvPr id="3" name="Image 0" descr="slide_comparacion.png">    </p:cNvPr>
           <p:cNvPicPr>
             <a:picLocks noChangeAspect="1"/>
           </p:cNvPicPr>
           <p:nvPr/>
         </p:nvPicPr>
         <p:blipFill>
-          <a:blip r:embed="rId3"/>
+          <a:blip r:embed="rId1"/>
           <a:stretch>
             <a:fillRect/>
           </a:stretch>
@@ -4537,7 +6069,7 @@
             <a:prstDash val="solid"/>
           </a:ln>
           <a:effectLst>
-            <a:outerShdw blurRad="101600" dist="25400" dir="5400000" algn="bl" rotWithShape="0">
+            <a:outerShdw sx="100000" sy="100000" kx="0" ky="0" algn="bl" rotWithShape="0" blurRad="101600" dist="25400" dir="5400000">
               <a:srgbClr val="9AA5B8">
                 <a:alpha val="25000"/>
               </a:srgbClr>
@@ -4566,7 +6098,7 @@
           <a:bodyPr wrap="square" rtlCol="0" anchor="ctr"/>
           <a:lstStyle/>
           <a:p>
-            <a:pPr marL="0" indent="0" algn="ctr">
+            <a:pPr algn="ctr" indent="0" marL="0">
               <a:buNone/>
             </a:pPr>
             <a:r>
@@ -4605,7 +6137,7 @@
           <a:bodyPr wrap="square" rtlCol="0" anchor="ctr"/>
           <a:lstStyle/>
           <a:p>
-            <a:pPr marL="0" indent="0" algn="ctr">
+            <a:pPr algn="ctr" indent="0" marL="0">
               <a:buNone/>
             </a:pPr>
             <a:r>
@@ -4622,7 +6154,7 @@
             <a:endParaRPr lang="en-US" sz="1300" dirty="0"/>
           </a:p>
           <a:p>
-            <a:pPr marL="0" indent="0" algn="ctr">
+            <a:pPr algn="ctr" indent="0" marL="0">
               <a:buNone/>
             </a:pPr>
             <a:r>
@@ -4683,7 +6215,7 @@
           <a:bodyPr wrap="square" rtlCol="0" anchor="ctr"/>
           <a:lstStyle/>
           <a:p>
-            <a:pPr marL="0" indent="0" algn="ctr">
+            <a:pPr algn="ctr" indent="0" marL="0">
               <a:buNone/>
             </a:pPr>
             <a:r>
@@ -4722,7 +6254,7 @@
           <a:bodyPr wrap="square" rtlCol="0" anchor="ctr"/>
           <a:lstStyle/>
           <a:p>
-            <a:pPr marL="0" indent="0" algn="ctr">
+            <a:pPr algn="ctr" indent="0" marL="0">
               <a:buNone/>
             </a:pPr>
             <a:r>
@@ -4761,7 +6293,7 @@
           <a:bodyPr wrap="square" rtlCol="0" anchor="ctr"/>
           <a:lstStyle/>
           <a:p>
-            <a:pPr marL="0" indent="0">
+            <a:pPr indent="0" marL="0">
               <a:buNone/>
             </a:pPr>
             <a:r>
@@ -4787,15 +6319,14 @@
 </p:sld>
 </file>
 
-<file path=ppt/slides/slide8.xml><?xml version="1.0" encoding="utf-8"?>
+<file path=ppt/slides/slide9.xml><?xml version="1.0" encoding="utf-8"?>
 <p:sld xmlns:a="http://schemas.openxmlformats.org/drawingml/2006/main" xmlns:r="http://schemas.openxmlformats.org/officeDocument/2006/relationships" xmlns:p="http://schemas.openxmlformats.org/presentationml/2006/main">
-  <p:cSld name="Slide 8">
+  <p:cSld name="Slide 9">
     <p:bg>
       <p:bgPr>
         <a:solidFill>
           <a:srgbClr val="F4F6FA"/>
         </a:solidFill>
-        <a:effectLst/>
       </p:bgPr>
     </p:bg>
     <p:spTree>
@@ -4833,7 +6364,7 @@
           <a:bodyPr wrap="square" rtlCol="0" anchor="ctr"/>
           <a:lstStyle/>
           <a:p>
-            <a:pPr marL="0" indent="0">
+            <a:pPr indent="0" marL="0">
               <a:buNone/>
             </a:pPr>
             <a:r>
@@ -4872,7 +6403,7 @@
           <a:bodyPr wrap="square" rtlCol="0" anchor="ctr"/>
           <a:lstStyle/>
           <a:p>
-            <a:pPr marL="0" indent="0">
+            <a:pPr indent="0" marL="0">
               <a:buNone/>
             </a:pPr>
             <a:r>
@@ -4892,14 +6423,14 @@
       </p:sp>
       <p:pic>
         <p:nvPicPr>
-          <p:cNvPr id="4" name="Image 0" descr="slide_tornado.png"/>
+          <p:cNvPr id="4" name="Image 0" descr="slide_tornado.png">    </p:cNvPr>
           <p:cNvPicPr>
             <a:picLocks noChangeAspect="1"/>
           </p:cNvPicPr>
           <p:nvPr/>
         </p:nvPicPr>
         <p:blipFill>
-          <a:blip r:embed="rId3"/>
+          <a:blip r:embed="rId1"/>
           <a:stretch>
             <a:fillRect/>
           </a:stretch>
@@ -4962,7 +6493,7 @@
           <a:bodyPr wrap="square" rtlCol="0" anchor="ctr"/>
           <a:lstStyle/>
           <a:p>
-            <a:pPr marL="0" indent="0">
+            <a:pPr indent="0" marL="0">
               <a:buNone/>
             </a:pPr>
             <a:r>
@@ -5001,7 +6532,7 @@
           <a:bodyPr wrap="square" rtlCol="0" anchor="ctr"/>
           <a:lstStyle/>
           <a:p>
-            <a:pPr marL="0" indent="0">
+            <a:pPr indent="0" marL="0">
               <a:buNone/>
             </a:pPr>
             <a:r>
@@ -5067,7 +6598,7 @@
           <a:bodyPr wrap="square" rtlCol="0" anchor="ctr"/>
           <a:lstStyle/>
           <a:p>
-            <a:pPr marL="0" indent="0">
+            <a:pPr indent="0" marL="0">
               <a:buNone/>
             </a:pPr>
             <a:r>
@@ -5106,7 +6637,7 @@
           <a:bodyPr wrap="square" rtlCol="0" anchor="ctr"/>
           <a:lstStyle/>
           <a:p>
-            <a:pPr marL="0" indent="0">
+            <a:pPr indent="0" marL="0">
               <a:buNone/>
             </a:pPr>
             <a:r>
@@ -5121,470 +6652,6 @@
               <a:t>+30 % en el tiempo de retiro mueve el óptimo de 30 a 50 compartimentos chicos</a:t>
             </a:r>
             <a:endParaRPr lang="en-US" sz="1350" dirty="0"/>
-          </a:p>
-        </p:txBody>
-      </p:sp>
-    </p:spTree>
-  </p:cSld>
-  <p:clrMapOvr>
-    <a:masterClrMapping/>
-  </p:clrMapOvr>
-</p:sld>
-</file>
-
-<file path=ppt/slides/slide9.xml><?xml version="1.0" encoding="utf-8"?>
-<p:sld xmlns:a="http://schemas.openxmlformats.org/drawingml/2006/main" xmlns:r="http://schemas.openxmlformats.org/officeDocument/2006/relationships" xmlns:p="http://schemas.openxmlformats.org/presentationml/2006/main">
-  <p:cSld name="Slide 9">
-    <p:bg>
-      <p:bgPr>
-        <a:solidFill>
-          <a:srgbClr val="1E2761"/>
-        </a:solidFill>
-        <a:effectLst/>
-      </p:bgPr>
-    </p:bg>
-    <p:spTree>
-      <p:nvGrpSpPr>
-        <p:cNvPr id="1" name=""/>
-        <p:cNvGrpSpPr/>
-        <p:nvPr/>
-      </p:nvGrpSpPr>
-      <p:grpSpPr>
-        <a:xfrm>
-          <a:off x="0" y="0"/>
-          <a:ext cx="0" cy="0"/>
-          <a:chOff x="0" y="0"/>
-          <a:chExt cx="0" cy="0"/>
-        </a:xfrm>
-      </p:grpSpPr>
-      <p:sp>
-        <p:nvSpPr>
-          <p:cNvPr id="2" name="Text 0"/>
-          <p:cNvSpPr/>
-          <p:nvPr/>
-        </p:nvSpPr>
-        <p:spPr>
-          <a:xfrm>
-            <a:off x="731520" y="457200"/>
-            <a:ext cx="10698480" cy="731520"/>
-          </a:xfrm>
-          <a:prstGeom prst="rect">
-            <a:avLst/>
-          </a:prstGeom>
-          <a:noFill/>
-          <a:ln/>
-        </p:spPr>
-        <p:txBody>
-          <a:bodyPr wrap="square" rtlCol="0" anchor="ctr"/>
-          <a:lstStyle/>
-          <a:p>
-            <a:pPr marL="0" indent="0">
-              <a:buNone/>
-            </a:pPr>
-            <a:r>
-              <a:rPr lang="en-US" sz="3400" b="1" dirty="0">
-                <a:solidFill>
-                  <a:srgbClr val="FFFFFF"/>
-                </a:solidFill>
-                <a:latin typeface="Cambria" pitchFamily="34" charset="0"/>
-                <a:ea typeface="Cambria" pitchFamily="34" charset="-122"/>
-                <a:cs typeface="Cambria" pitchFamily="34" charset="-120"/>
-              </a:rPr>
-              <a:t>Conclusiones</a:t>
-            </a:r>
-            <a:endParaRPr lang="en-US" sz="3400" dirty="0"/>
-          </a:p>
-        </p:txBody>
-      </p:sp>
-      <p:sp>
-        <p:nvSpPr>
-          <p:cNvPr id="3" name="Shape 1"/>
-          <p:cNvSpPr/>
-          <p:nvPr/>
-        </p:nvSpPr>
-        <p:spPr>
-          <a:xfrm>
-            <a:off x="777240" y="1554480"/>
-            <a:ext cx="384048" cy="384048"/>
-          </a:xfrm>
-          <a:prstGeom prst="ellipse">
-            <a:avLst/>
-          </a:prstGeom>
-          <a:solidFill>
-            <a:srgbClr val="E8833A"/>
-          </a:solidFill>
-          <a:ln/>
-        </p:spPr>
-      </p:sp>
-      <p:sp>
-        <p:nvSpPr>
-          <p:cNvPr id="4" name="Text 2"/>
-          <p:cNvSpPr/>
-          <p:nvPr/>
-        </p:nvSpPr>
-        <p:spPr>
-          <a:xfrm>
-            <a:off x="1371600" y="1463040"/>
-            <a:ext cx="10058400" cy="411480"/>
-          </a:xfrm>
-          <a:prstGeom prst="rect">
-            <a:avLst/>
-          </a:prstGeom>
-          <a:noFill/>
-          <a:ln/>
-        </p:spPr>
-        <p:txBody>
-          <a:bodyPr wrap="square" lIns="0" tIns="0" rIns="0" bIns="0" rtlCol="0" anchor="ctr"/>
-          <a:lstStyle/>
-          <a:p>
-            <a:pPr marL="0" indent="0">
-              <a:buNone/>
-            </a:pPr>
-            <a:r>
-              <a:rPr lang="en-US" sz="2000" b="1" dirty="0">
-                <a:solidFill>
-                  <a:srgbClr val="E8833A"/>
-                </a:solidFill>
-                <a:latin typeface="Cambria" pitchFamily="34" charset="0"/>
-                <a:ea typeface="Cambria" pitchFamily="34" charset="-122"/>
-                <a:cs typeface="Cambria" pitchFamily="34" charset="-120"/>
-              </a:rPr>
-              <a:t>Existe un óptimo</a:t>
-            </a:r>
-            <a:endParaRPr lang="en-US" sz="2000" dirty="0"/>
-          </a:p>
-        </p:txBody>
-      </p:sp>
-      <p:sp>
-        <p:nvSpPr>
-          <p:cNvPr id="5" name="Text 3"/>
-          <p:cNvSpPr/>
-          <p:nvPr/>
-        </p:nvSpPr>
-        <p:spPr>
-          <a:xfrm>
-            <a:off x="1371600" y="1874520"/>
-            <a:ext cx="10058400" cy="548640"/>
-          </a:xfrm>
-          <a:prstGeom prst="rect">
-            <a:avLst/>
-          </a:prstGeom>
-          <a:noFill/>
-          <a:ln/>
-        </p:spPr>
-        <p:txBody>
-          <a:bodyPr wrap="square" lIns="0" tIns="0" rIns="0" bIns="0" rtlCol="0" anchor="ctr"/>
-          <a:lstStyle/>
-          <a:p>
-            <a:pPr marL="0" indent="0">
-              <a:buNone/>
-            </a:pPr>
-            <a:r>
-              <a:rPr lang="en-US" sz="1450" dirty="0">
-                <a:solidFill>
-                  <a:srgbClr val="FFFFFF"/>
-                </a:solidFill>
-                <a:latin typeface="Calibri" pitchFamily="34" charset="0"/>
-                <a:ea typeface="Calibri" pitchFamily="34" charset="-122"/>
-                <a:cs typeface="Calibri" pitchFamily="34" charset="-120"/>
-              </a:rPr>
-              <a:t>La curva de costo tiene mínimo interior: ni máxima capacidad ni mínima inversión.</a:t>
-            </a:r>
-            <a:endParaRPr lang="en-US" sz="1450" dirty="0"/>
-          </a:p>
-        </p:txBody>
-      </p:sp>
-      <p:sp>
-        <p:nvSpPr>
-          <p:cNvPr id="6" name="Shape 4"/>
-          <p:cNvSpPr/>
-          <p:nvPr/>
-        </p:nvSpPr>
-        <p:spPr>
-          <a:xfrm>
-            <a:off x="777240" y="2724912"/>
-            <a:ext cx="384048" cy="384048"/>
-          </a:xfrm>
-          <a:prstGeom prst="ellipse">
-            <a:avLst/>
-          </a:prstGeom>
-          <a:solidFill>
-            <a:srgbClr val="E8833A"/>
-          </a:solidFill>
-          <a:ln/>
-        </p:spPr>
-      </p:sp>
-      <p:sp>
-        <p:nvSpPr>
-          <p:cNvPr id="7" name="Text 5"/>
-          <p:cNvSpPr/>
-          <p:nvPr/>
-        </p:nvSpPr>
-        <p:spPr>
-          <a:xfrm>
-            <a:off x="1371600" y="2633472"/>
-            <a:ext cx="10058400" cy="411480"/>
-          </a:xfrm>
-          <a:prstGeom prst="rect">
-            <a:avLst/>
-          </a:prstGeom>
-          <a:noFill/>
-          <a:ln/>
-        </p:spPr>
-        <p:txBody>
-          <a:bodyPr wrap="square" lIns="0" tIns="0" rIns="0" bIns="0" rtlCol="0" anchor="ctr"/>
-          <a:lstStyle/>
-          <a:p>
-            <a:pPr marL="0" indent="0">
-              <a:buNone/>
-            </a:pPr>
-            <a:r>
-              <a:rPr lang="en-US" sz="2000" b="1" dirty="0">
-                <a:solidFill>
-                  <a:srgbClr val="E8833A"/>
-                </a:solidFill>
-                <a:latin typeface="Cambria" pitchFamily="34" charset="0"/>
-                <a:ea typeface="Cambria" pitchFamily="34" charset="-122"/>
-                <a:cs typeface="Cambria" pitchFamily="34" charset="-120"/>
-              </a:rPr>
-              <a:t>La estacionalidad decide el diseño</a:t>
-            </a:r>
-            <a:endParaRPr lang="en-US" sz="2000" dirty="0"/>
-          </a:p>
-        </p:txBody>
-      </p:sp>
-      <p:sp>
-        <p:nvSpPr>
-          <p:cNvPr id="8" name="Text 6"/>
-          <p:cNvSpPr/>
-          <p:nvPr/>
-        </p:nvSpPr>
-        <p:spPr>
-          <a:xfrm>
-            <a:off x="1371600" y="3044952"/>
-            <a:ext cx="10058400" cy="548640"/>
-          </a:xfrm>
-          <a:prstGeom prst="rect">
-            <a:avLst/>
-          </a:prstGeom>
-          <a:noFill/>
-          <a:ln/>
-        </p:spPr>
-        <p:txBody>
-          <a:bodyPr wrap="square" lIns="0" tIns="0" rIns="0" bIns="0" rtlCol="0" anchor="ctr"/>
-          <a:lstStyle/>
-          <a:p>
-            <a:pPr marL="0" indent="0">
-              <a:buNone/>
-            </a:pPr>
-            <a:r>
-              <a:rPr lang="en-US" sz="1450" dirty="0">
-                <a:solidFill>
-                  <a:srgbClr val="FFFFFF"/>
-                </a:solidFill>
-                <a:latin typeface="Calibri" pitchFamily="34" charset="0"/>
-                <a:ea typeface="Calibri" pitchFamily="34" charset="-122"/>
-                <a:cs typeface="Calibri" pitchFamily="34" charset="-120"/>
-              </a:rPr>
-              <a:t>Cyber exige más capacidad que Navidad: hay que elegir entre dimensionar para el pico o para el promedio.</a:t>
-            </a:r>
-            <a:endParaRPr lang="en-US" sz="1450" dirty="0"/>
-          </a:p>
-        </p:txBody>
-      </p:sp>
-      <p:sp>
-        <p:nvSpPr>
-          <p:cNvPr id="9" name="Shape 7"/>
-          <p:cNvSpPr/>
-          <p:nvPr/>
-        </p:nvSpPr>
-        <p:spPr>
-          <a:xfrm>
-            <a:off x="777240" y="3895344"/>
-            <a:ext cx="384048" cy="384048"/>
-          </a:xfrm>
-          <a:prstGeom prst="ellipse">
-            <a:avLst/>
-          </a:prstGeom>
-          <a:solidFill>
-            <a:srgbClr val="E8833A"/>
-          </a:solidFill>
-          <a:ln/>
-        </p:spPr>
-      </p:sp>
-      <p:sp>
-        <p:nvSpPr>
-          <p:cNvPr id="10" name="Text 8"/>
-          <p:cNvSpPr/>
-          <p:nvPr/>
-        </p:nvSpPr>
-        <p:spPr>
-          <a:xfrm>
-            <a:off x="1371600" y="3803904"/>
-            <a:ext cx="10058400" cy="411480"/>
-          </a:xfrm>
-          <a:prstGeom prst="rect">
-            <a:avLst/>
-          </a:prstGeom>
-          <a:noFill/>
-          <a:ln/>
-        </p:spPr>
-        <p:txBody>
-          <a:bodyPr wrap="square" lIns="0" tIns="0" rIns="0" bIns="0" rtlCol="0" anchor="ctr"/>
-          <a:lstStyle/>
-          <a:p>
-            <a:pPr marL="0" indent="0">
-              <a:buNone/>
-            </a:pPr>
-            <a:r>
-              <a:rPr lang="en-US" sz="2000" b="1" dirty="0">
-                <a:solidFill>
-                  <a:srgbClr val="E8833A"/>
-                </a:solidFill>
-                <a:latin typeface="Cambria" pitchFamily="34" charset="0"/>
-                <a:ea typeface="Cambria" pitchFamily="34" charset="-122"/>
-                <a:cs typeface="Cambria" pitchFamily="34" charset="-120"/>
-              </a:rPr>
-              <a:t>Robusto a los costos</a:t>
-            </a:r>
-            <a:endParaRPr lang="en-US" sz="2000" dirty="0"/>
-          </a:p>
-        </p:txBody>
-      </p:sp>
-      <p:sp>
-        <p:nvSpPr>
-          <p:cNvPr id="11" name="Text 9"/>
-          <p:cNvSpPr/>
-          <p:nvPr/>
-        </p:nvSpPr>
-        <p:spPr>
-          <a:xfrm>
-            <a:off x="1371600" y="4215384"/>
-            <a:ext cx="10058400" cy="548640"/>
-          </a:xfrm>
-          <a:prstGeom prst="rect">
-            <a:avLst/>
-          </a:prstGeom>
-          <a:noFill/>
-          <a:ln/>
-        </p:spPr>
-        <p:txBody>
-          <a:bodyPr wrap="square" lIns="0" tIns="0" rIns="0" bIns="0" rtlCol="0" anchor="ctr"/>
-          <a:lstStyle/>
-          <a:p>
-            <a:pPr marL="0" indent="0">
-              <a:buNone/>
-            </a:pPr>
-            <a:r>
-              <a:rPr lang="en-US" sz="1450" dirty="0">
-                <a:solidFill>
-                  <a:srgbClr val="FFFFFF"/>
-                </a:solidFill>
-                <a:latin typeface="Calibri" pitchFamily="34" charset="0"/>
-                <a:ea typeface="Calibri" pitchFamily="34" charset="-122"/>
-                <a:cs typeface="Calibri" pitchFamily="34" charset="-120"/>
-              </a:rPr>
-              <a:t>El diseño óptimo no cambia ante variaciones de ±30 % en los parámetros económicos.</a:t>
-            </a:r>
-            <a:endParaRPr lang="en-US" sz="1450" dirty="0"/>
-          </a:p>
-        </p:txBody>
-      </p:sp>
-      <p:sp>
-        <p:nvSpPr>
-          <p:cNvPr id="12" name="Shape 10"/>
-          <p:cNvSpPr/>
-          <p:nvPr/>
-        </p:nvSpPr>
-        <p:spPr>
-          <a:xfrm>
-            <a:off x="777240" y="5065776"/>
-            <a:ext cx="384048" cy="384048"/>
-          </a:xfrm>
-          <a:prstGeom prst="ellipse">
-            <a:avLst/>
-          </a:prstGeom>
-          <a:solidFill>
-            <a:srgbClr val="E8833A"/>
-          </a:solidFill>
-          <a:ln/>
-        </p:spPr>
-      </p:sp>
-      <p:sp>
-        <p:nvSpPr>
-          <p:cNvPr id="13" name="Text 11"/>
-          <p:cNvSpPr/>
-          <p:nvPr/>
-        </p:nvSpPr>
-        <p:spPr>
-          <a:xfrm>
-            <a:off x="1371600" y="4974336"/>
-            <a:ext cx="10058400" cy="411480"/>
-          </a:xfrm>
-          <a:prstGeom prst="rect">
-            <a:avLst/>
-          </a:prstGeom>
-          <a:noFill/>
-          <a:ln/>
-        </p:spPr>
-        <p:txBody>
-          <a:bodyPr wrap="square" lIns="0" tIns="0" rIns="0" bIns="0" rtlCol="0" anchor="ctr"/>
-          <a:lstStyle/>
-          <a:p>
-            <a:pPr marL="0" indent="0">
-              <a:buNone/>
-            </a:pPr>
-            <a:r>
-              <a:rPr lang="en-US" sz="2000" b="1" dirty="0">
-                <a:solidFill>
-                  <a:srgbClr val="E8833A"/>
-                </a:solidFill>
-                <a:latin typeface="Cambria" pitchFamily="34" charset="0"/>
-                <a:ea typeface="Cambria" pitchFamily="34" charset="-122"/>
-                <a:cs typeface="Cambria" pitchFamily="34" charset="-120"/>
-              </a:rPr>
-              <a:t>El límite está en el comportamiento</a:t>
-            </a:r>
-            <a:endParaRPr lang="en-US" sz="2000" dirty="0"/>
-          </a:p>
-        </p:txBody>
-      </p:sp>
-      <p:sp>
-        <p:nvSpPr>
-          <p:cNvPr id="14" name="Text 12"/>
-          <p:cNvSpPr/>
-          <p:nvPr/>
-        </p:nvSpPr>
-        <p:spPr>
-          <a:xfrm>
-            <a:off x="1371600" y="5385816"/>
-            <a:ext cx="10058400" cy="548640"/>
-          </a:xfrm>
-          <a:prstGeom prst="rect">
-            <a:avLst/>
-          </a:prstGeom>
-          <a:noFill/>
-          <a:ln/>
-        </p:spPr>
-        <p:txBody>
-          <a:bodyPr wrap="square" lIns="0" tIns="0" rIns="0" bIns="0" rtlCol="0" anchor="ctr"/>
-          <a:lstStyle/>
-          <a:p>
-            <a:pPr marL="0" indent="0">
-              <a:buNone/>
-            </a:pPr>
-            <a:r>
-              <a:rPr lang="en-US" sz="1450" dirty="0">
-                <a:solidFill>
-                  <a:srgbClr val="FFFFFF"/>
-                </a:solidFill>
-                <a:latin typeface="Calibri" pitchFamily="34" charset="0"/>
-                <a:ea typeface="Calibri" pitchFamily="34" charset="-122"/>
-                <a:cs typeface="Calibri" pitchFamily="34" charset="-120"/>
-              </a:rPr>
-              <a:t>El tiempo de retiro escala la capacidad requerida; sólo podrá medirse con la red en operación.</a:t>
-            </a:r>
-            <a:endParaRPr lang="en-US" sz="1450" dirty="0"/>
           </a:p>
         </p:txBody>
       </p:sp>
@@ -5889,319 +6956,4 @@
     </a:ext>
   </a:extLst>
 </a:theme>
-</file>
-
-<file path=ppt/theme/theme2.xml><?xml version="1.0" encoding="utf-8"?>
-<a:theme xmlns:a="http://schemas.openxmlformats.org/drawingml/2006/main" name="Tema de Office">
-  <a:themeElements>
-    <a:clrScheme name="Office">
-      <a:dk1>
-        <a:sysClr val="windowText" lastClr="000000"/>
-      </a:dk1>
-      <a:lt1>
-        <a:sysClr val="window" lastClr="FFFFFF"/>
-      </a:lt1>
-      <a:dk2>
-        <a:srgbClr val="0E2841"/>
-      </a:dk2>
-      <a:lt2>
-        <a:srgbClr val="E8E8E8"/>
-      </a:lt2>
-      <a:accent1>
-        <a:srgbClr val="156082"/>
-      </a:accent1>
-      <a:accent2>
-        <a:srgbClr val="E97132"/>
-      </a:accent2>
-      <a:accent3>
-        <a:srgbClr val="196B24"/>
-      </a:accent3>
-      <a:accent4>
-        <a:srgbClr val="0F9ED5"/>
-      </a:accent4>
-      <a:accent5>
-        <a:srgbClr val="A02B93"/>
-      </a:accent5>
-      <a:accent6>
-        <a:srgbClr val="4EA72E"/>
-      </a:accent6>
-      <a:hlink>
-        <a:srgbClr val="467886"/>
-      </a:hlink>
-      <a:folHlink>
-        <a:srgbClr val="96607D"/>
-      </a:folHlink>
-    </a:clrScheme>
-    <a:fontScheme name="Office">
-      <a:majorFont>
-        <a:latin typeface="Aptos Display" panose="02110004020202020204"/>
-        <a:ea typeface=""/>
-        <a:cs typeface=""/>
-        <a:font script="Jpan" typeface="游ゴシック Light"/>
-        <a:font script="Hang" typeface="맑은 고딕"/>
-        <a:font script="Hans" typeface="等线 Light"/>
-        <a:font script="Hant" typeface="新細明體"/>
-        <a:font script="Arab" typeface="Times New Roman"/>
-        <a:font script="Hebr" typeface="Times New Roman"/>
-        <a:font script="Thai" typeface="Angsana New"/>
-        <a:font script="Ethi" typeface="Nyala"/>
-        <a:font script="Beng" typeface="Vrinda"/>
-        <a:font script="Gujr" typeface="Shruti"/>
-        <a:font script="Khmr" typeface="MoolBoran"/>
-        <a:font script="Knda" typeface="Tunga"/>
-        <a:font script="Guru" typeface="Raavi"/>
-        <a:font script="Cans" typeface="Euphemia"/>
-        <a:font script="Cher" typeface="Plantagenet Cherokee"/>
-        <a:font script="Yiii" typeface="Microsoft Yi Baiti"/>
-        <a:font script="Tibt" typeface="Microsoft Himalaya"/>
-        <a:font script="Thaa" typeface="MV Boli"/>
-        <a:font script="Deva" typeface="Mangal"/>
-        <a:font script="Telu" typeface="Gautami"/>
-        <a:font script="Taml" typeface="Latha"/>
-        <a:font script="Syrc" typeface="Estrangelo Edessa"/>
-        <a:font script="Orya" typeface="Kalinga"/>
-        <a:font script="Mlym" typeface="Kartika"/>
-        <a:font script="Laoo" typeface="DokChampa"/>
-        <a:font script="Sinh" typeface="Iskoola Pota"/>
-        <a:font script="Mong" typeface="Mongolian Baiti"/>
-        <a:font script="Viet" typeface="Times New Roman"/>
-        <a:font script="Uigh" typeface="Microsoft Uighur"/>
-        <a:font script="Geor" typeface="Sylfaen"/>
-        <a:font script="Armn" typeface="Arial"/>
-        <a:font script="Bugi" typeface="Leelawadee UI"/>
-        <a:font script="Bopo" typeface="Microsoft JhengHei"/>
-        <a:font script="Java" typeface="Javanese Text"/>
-        <a:font script="Lisu" typeface="Segoe UI"/>
-        <a:font script="Mymr" typeface="Myanmar Text"/>
-        <a:font script="Nkoo" typeface="Ebrima"/>
-        <a:font script="Olck" typeface="Nirmala UI"/>
-        <a:font script="Osma" typeface="Ebrima"/>
-        <a:font script="Phag" typeface="Phagspa"/>
-        <a:font script="Syrn" typeface="Estrangelo Edessa"/>
-        <a:font script="Syrj" typeface="Estrangelo Edessa"/>
-        <a:font script="Syre" typeface="Estrangelo Edessa"/>
-        <a:font script="Sora" typeface="Nirmala UI"/>
-        <a:font script="Tale" typeface="Microsoft Tai Le"/>
-        <a:font script="Talu" typeface="Microsoft New Tai Lue"/>
-        <a:font script="Tfng" typeface="Ebrima"/>
-      </a:majorFont>
-      <a:minorFont>
-        <a:latin typeface="Aptos" panose="02110004020202020204"/>
-        <a:ea typeface=""/>
-        <a:cs typeface=""/>
-        <a:font script="Jpan" typeface="游ゴシック"/>
-        <a:font script="Hang" typeface="맑은 고딕"/>
-        <a:font script="Hans" typeface="等线"/>
-        <a:font script="Hant" typeface="新細明體"/>
-        <a:font script="Arab" typeface="Arial"/>
-        <a:font script="Hebr" typeface="Arial"/>
-        <a:font script="Thai" typeface="Cordia New"/>
-        <a:font script="Ethi" typeface="Nyala"/>
-        <a:font script="Beng" typeface="Vrinda"/>
-        <a:font script="Gujr" typeface="Shruti"/>
-        <a:font script="Khmr" typeface="DaunPenh"/>
-        <a:font script="Knda" typeface="Tunga"/>
-        <a:font script="Guru" typeface="Raavi"/>
-        <a:font script="Cans" typeface="Euphemia"/>
-        <a:font script="Cher" typeface="Plantagenet Cherokee"/>
-        <a:font script="Yiii" typeface="Microsoft Yi Baiti"/>
-        <a:font script="Tibt" typeface="Microsoft Himalaya"/>
-        <a:font script="Thaa" typeface="MV Boli"/>
-        <a:font script="Deva" typeface="Mangal"/>
-        <a:font script="Telu" typeface="Gautami"/>
-        <a:font script="Taml" typeface="Latha"/>
-        <a:font script="Syrc" typeface="Estrangelo Edessa"/>
-        <a:font script="Orya" typeface="Kalinga"/>
-        <a:font script="Mlym" typeface="Kartika"/>
-        <a:font script="Laoo" typeface="DokChampa"/>
-        <a:font script="Sinh" typeface="Iskoola Pota"/>
-        <a:font script="Mong" typeface="Mongolian Baiti"/>
-        <a:font script="Viet" typeface="Arial"/>
-        <a:font script="Uigh" typeface="Microsoft Uighur"/>
-        <a:font script="Geor" typeface="Sylfaen"/>
-        <a:font script="Armn" typeface="Arial"/>
-        <a:font script="Bugi" typeface="Leelawadee UI"/>
-        <a:font script="Bopo" typeface="Microsoft JhengHei"/>
-        <a:font script="Java" typeface="Javanese Text"/>
-        <a:font script="Lisu" typeface="Segoe UI"/>
-        <a:font script="Mymr" typeface="Myanmar Text"/>
-        <a:font script="Nkoo" typeface="Ebrima"/>
-        <a:font script="Olck" typeface="Nirmala UI"/>
-        <a:font script="Osma" typeface="Ebrima"/>
-        <a:font script="Phag" typeface="Phagspa"/>
-        <a:font script="Syrn" typeface="Estrangelo Edessa"/>
-        <a:font script="Syrj" typeface="Estrangelo Edessa"/>
-        <a:font script="Syre" typeface="Estrangelo Edessa"/>
-        <a:font script="Sora" typeface="Nirmala UI"/>
-        <a:font script="Tale" typeface="Microsoft Tai Le"/>
-        <a:font script="Talu" typeface="Microsoft New Tai Lue"/>
-        <a:font script="Tfng" typeface="Ebrima"/>
-      </a:minorFont>
-    </a:fontScheme>
-    <a:fmtScheme name="Office">
-      <a:fillStyleLst>
-        <a:solidFill>
-          <a:schemeClr val="phClr"/>
-        </a:solidFill>
-        <a:gradFill rotWithShape="1">
-          <a:gsLst>
-            <a:gs pos="0">
-              <a:schemeClr val="phClr">
-                <a:lumMod val="110000"/>
-                <a:satMod val="105000"/>
-                <a:tint val="67000"/>
-              </a:schemeClr>
-            </a:gs>
-            <a:gs pos="50000">
-              <a:schemeClr val="phClr">
-                <a:lumMod val="105000"/>
-                <a:satMod val="103000"/>
-                <a:tint val="73000"/>
-              </a:schemeClr>
-            </a:gs>
-            <a:gs pos="100000">
-              <a:schemeClr val="phClr">
-                <a:lumMod val="105000"/>
-                <a:satMod val="109000"/>
-                <a:tint val="81000"/>
-              </a:schemeClr>
-            </a:gs>
-          </a:gsLst>
-          <a:lin ang="5400000" scaled="0"/>
-        </a:gradFill>
-        <a:gradFill rotWithShape="1">
-          <a:gsLst>
-            <a:gs pos="0">
-              <a:schemeClr val="phClr">
-                <a:satMod val="103000"/>
-                <a:lumMod val="102000"/>
-                <a:tint val="94000"/>
-              </a:schemeClr>
-            </a:gs>
-            <a:gs pos="50000">
-              <a:schemeClr val="phClr">
-                <a:satMod val="110000"/>
-                <a:lumMod val="100000"/>
-                <a:shade val="100000"/>
-              </a:schemeClr>
-            </a:gs>
-            <a:gs pos="100000">
-              <a:schemeClr val="phClr">
-                <a:lumMod val="99000"/>
-                <a:satMod val="120000"/>
-                <a:shade val="78000"/>
-              </a:schemeClr>
-            </a:gs>
-          </a:gsLst>
-          <a:lin ang="5400000" scaled="0"/>
-        </a:gradFill>
-      </a:fillStyleLst>
-      <a:lnStyleLst>
-        <a:ln w="12700" cap="flat" cmpd="sng" algn="ctr">
-          <a:solidFill>
-            <a:schemeClr val="phClr"/>
-          </a:solidFill>
-          <a:prstDash val="solid"/>
-          <a:miter lim="800000"/>
-        </a:ln>
-        <a:ln w="19050" cap="flat" cmpd="sng" algn="ctr">
-          <a:solidFill>
-            <a:schemeClr val="phClr"/>
-          </a:solidFill>
-          <a:prstDash val="solid"/>
-          <a:miter lim="800000"/>
-        </a:ln>
-        <a:ln w="25400" cap="flat" cmpd="sng" algn="ctr">
-          <a:solidFill>
-            <a:schemeClr val="phClr"/>
-          </a:solidFill>
-          <a:prstDash val="solid"/>
-          <a:miter lim="800000"/>
-        </a:ln>
-      </a:lnStyleLst>
-      <a:effectStyleLst>
-        <a:effectStyle>
-          <a:effectLst/>
-        </a:effectStyle>
-        <a:effectStyle>
-          <a:effectLst/>
-        </a:effectStyle>
-        <a:effectStyle>
-          <a:effectLst>
-            <a:outerShdw blurRad="57150" dist="19050" dir="5400000" algn="ctr" rotWithShape="0">
-              <a:srgbClr val="000000">
-                <a:alpha val="63000"/>
-              </a:srgbClr>
-            </a:outerShdw>
-          </a:effectLst>
-        </a:effectStyle>
-      </a:effectStyleLst>
-      <a:bgFillStyleLst>
-        <a:solidFill>
-          <a:schemeClr val="phClr"/>
-        </a:solidFill>
-        <a:solidFill>
-          <a:schemeClr val="phClr">
-            <a:tint val="95000"/>
-            <a:satMod val="170000"/>
-          </a:schemeClr>
-        </a:solidFill>
-        <a:gradFill rotWithShape="1">
-          <a:gsLst>
-            <a:gs pos="0">
-              <a:schemeClr val="phClr">
-                <a:tint val="93000"/>
-                <a:satMod val="150000"/>
-                <a:shade val="98000"/>
-                <a:lumMod val="102000"/>
-              </a:schemeClr>
-            </a:gs>
-            <a:gs pos="50000">
-              <a:schemeClr val="phClr">
-                <a:tint val="98000"/>
-                <a:satMod val="130000"/>
-                <a:shade val="90000"/>
-                <a:lumMod val="103000"/>
-              </a:schemeClr>
-            </a:gs>
-            <a:gs pos="100000">
-              <a:schemeClr val="phClr">
-                <a:shade val="63000"/>
-                <a:satMod val="120000"/>
-              </a:schemeClr>
-            </a:gs>
-          </a:gsLst>
-          <a:lin ang="5400000" scaled="0"/>
-        </a:gradFill>
-      </a:bgFillStyleLst>
-    </a:fmtScheme>
-  </a:themeElements>
-  <a:objectDefaults>
-    <a:lnDef>
-      <a:spPr/>
-      <a:bodyPr/>
-      <a:lstStyle/>
-      <a:style>
-        <a:lnRef idx="2">
-          <a:schemeClr val="accent1"/>
-        </a:lnRef>
-        <a:fillRef idx="0">
-          <a:schemeClr val="accent1"/>
-        </a:fillRef>
-        <a:effectRef idx="1">
-          <a:schemeClr val="accent1"/>
-        </a:effectRef>
-        <a:fontRef idx="minor">
-          <a:schemeClr val="tx1"/>
-        </a:fontRef>
-      </a:style>
-    </a:lnDef>
-  </a:objectDefaults>
-  <a:extraClrSchemeLst/>
-  <a:extLst>
-    <a:ext uri="{05A4C25C-085E-4340-85A3-A5531E510DB2}">
-      <thm15:themeFamily xmlns:thm15="http://schemas.microsoft.com/office/thememl/2012/main" name="Office Theme" id="{2E142A2C-CD16-42D6-873A-C26D2A0506FA}" vid="{1BDDFF52-6CD6-40A5-AB3C-68EB2F1E4D0A}"/>
-    </a:ext>
-  </a:extLst>
-</a:theme>
 </file>